--- a/slides/kpi.pptx
+++ b/slides/kpi.pptx
@@ -117,6 +117,11 @@
       </a:defRPr>
     </a:lvl9pPr>
   </p:defaultTextStyle>
+  <p:extLst>
+    <p:ext uri="{EFAFB233-063F-42B5-8137-9DF3F51BA10A}">
+      <p15:sldGuideLst xmlns:p15="http://schemas.microsoft.com/office/powerpoint/2012/main"/>
+    </p:ext>
+  </p:extLst>
 </p:presentation>
 </file>
 
@@ -2987,6 +2992,13 @@
             <a:schemeClr val="lt1"/>
           </a:fontRef>
         </p:style>
+        <p:txBody>
+          <a:bodyPr/>
+          <a:lstStyle/>
+          <a:p>
+            <a:endParaRPr lang="en-US"/>
+          </a:p>
+        </p:txBody>
       </p:sp>
       <p:pic>
         <p:nvPicPr>
@@ -3679,12 +3691,14 @@
         </p:nvSpPr>
         <p:spPr>
           <a:xfrm>
-            <a:off x="1451579" y="2015732"/>
-            <a:ext cx="9603275" cy="4137933"/>
-          </a:xfrm>
-        </p:spPr>
-        <p:txBody>
-          <a:bodyPr/>
+            <a:off x="1451579" y="1853754"/>
+            <a:ext cx="9603275" cy="4299911"/>
+          </a:xfrm>
+        </p:spPr>
+        <p:txBody>
+          <a:bodyPr>
+            <a:normAutofit/>
+          </a:bodyPr>
           <a:lstStyle/>
           <a:p>
             <a:r>
@@ -3696,14 +3710,14 @@
             <a:pPr lvl="1"/>
             <a:r>
               <a:rPr lang="en-US" dirty="0"/>
-              <a:t>Comparison in tableau. </a:t>
+              <a:t>Comparisons (more selecting, customizing, and comparing) in tableau. </a:t>
             </a:r>
           </a:p>
           <a:p>
             <a:pPr lvl="1"/>
             <a:r>
               <a:rPr lang="en-US" dirty="0"/>
-              <a:t>KPIs</a:t>
+              <a:t>KPIs and more parameter usage. </a:t>
             </a:r>
           </a:p>
           <a:p>
@@ -3737,7 +3751,20 @@
             <a:pPr lvl="1"/>
             <a:r>
               <a:rPr lang="en-US" dirty="0"/>
-              <a:t>Some MC, a few short answer, open book. </a:t>
+              <a:t>Some MC, a few short answer, open book, Chapters 12-16 (theoretical bits). </a:t>
+            </a:r>
+          </a:p>
+          <a:p>
+            <a:pPr lvl="1"/>
+            <a:r>
+              <a:rPr lang="en-US" dirty="0"/>
+              <a:t>It is pretty easy, there’s just not that much theory here.</a:t>
+            </a:r>
+          </a:p>
+          <a:p>
+            <a:r>
+              <a:rPr lang="en-US" dirty="0"/>
+              <a:t>Project – you should be forming your ideas, looking for data, and checking if it works…</a:t>
             </a:r>
           </a:p>
           <a:p>
@@ -4601,7 +4628,7 @@
           <a:p>
             <a:r>
               <a:rPr lang="en-US" dirty="0"/>
-              <a:t>Comparison</a:t>
+              <a:t>Comparison and KPI</a:t>
             </a:r>
           </a:p>
         </p:txBody>

--- a/slides/kpi.pptx
+++ b/slides/kpi.pptx
@@ -10,15 +10,19 @@
     <p:sldId id="257" r:id="rId4"/>
     <p:sldId id="258" r:id="rId5"/>
     <p:sldId id="260" r:id="rId6"/>
-    <p:sldId id="259" r:id="rId7"/>
-    <p:sldId id="261" r:id="rId8"/>
-    <p:sldId id="262" r:id="rId9"/>
-    <p:sldId id="263" r:id="rId10"/>
-    <p:sldId id="266" r:id="rId11"/>
-    <p:sldId id="264" r:id="rId12"/>
-    <p:sldId id="265" r:id="rId13"/>
-    <p:sldId id="267" r:id="rId14"/>
-    <p:sldId id="268" r:id="rId15"/>
+    <p:sldId id="271" r:id="rId7"/>
+    <p:sldId id="259" r:id="rId8"/>
+    <p:sldId id="272" r:id="rId9"/>
+    <p:sldId id="270" r:id="rId10"/>
+    <p:sldId id="261" r:id="rId11"/>
+    <p:sldId id="273" r:id="rId12"/>
+    <p:sldId id="262" r:id="rId13"/>
+    <p:sldId id="263" r:id="rId14"/>
+    <p:sldId id="266" r:id="rId15"/>
+    <p:sldId id="264" r:id="rId16"/>
+    <p:sldId id="265" r:id="rId17"/>
+    <p:sldId id="267" r:id="rId18"/>
+    <p:sldId id="268" r:id="rId19"/>
   </p:sldIdLst>
   <p:sldSz cx="12192000" cy="6858000"/>
   <p:notesSz cx="6858000" cy="9144000"/>
@@ -264,7 +268,7 @@
           <a:p>
             <a:fld id="{4F9C66F0-894B-A64A-8A1B-2351E00312CE}" type="datetimeFigureOut">
               <a:rPr lang="en-US" smtClean="0"/>
-              <a:t>11/20/25</a:t>
+              <a:t>2/24/26</a:t>
             </a:fld>
             <a:endParaRPr lang="en-US"/>
           </a:p>
@@ -475,7 +479,7 @@
           <a:p>
             <a:fld id="{4F9C66F0-894B-A64A-8A1B-2351E00312CE}" type="datetimeFigureOut">
               <a:rPr lang="en-US" smtClean="0"/>
-              <a:t>11/20/25</a:t>
+              <a:t>2/24/26</a:t>
             </a:fld>
             <a:endParaRPr lang="en-US"/>
           </a:p>
@@ -690,7 +694,7 @@
           <a:p>
             <a:fld id="{4F9C66F0-894B-A64A-8A1B-2351E00312CE}" type="datetimeFigureOut">
               <a:rPr lang="en-US" smtClean="0"/>
-              <a:t>11/20/25</a:t>
+              <a:t>2/24/26</a:t>
             </a:fld>
             <a:endParaRPr lang="en-US"/>
           </a:p>
@@ -891,7 +895,7 @@
           <a:p>
             <a:fld id="{4F9C66F0-894B-A64A-8A1B-2351E00312CE}" type="datetimeFigureOut">
               <a:rPr lang="en-US" smtClean="0"/>
-              <a:t>11/20/25</a:t>
+              <a:t>2/24/26</a:t>
             </a:fld>
             <a:endParaRPr lang="en-US"/>
           </a:p>
@@ -1170,7 +1174,7 @@
           <a:p>
             <a:fld id="{4F9C66F0-894B-A64A-8A1B-2351E00312CE}" type="datetimeFigureOut">
               <a:rPr lang="en-US" smtClean="0"/>
-              <a:t>11/20/25</a:t>
+              <a:t>2/24/26</a:t>
             </a:fld>
             <a:endParaRPr lang="en-US"/>
           </a:p>
@@ -1438,7 +1442,7 @@
           <a:p>
             <a:fld id="{4F9C66F0-894B-A64A-8A1B-2351E00312CE}" type="datetimeFigureOut">
               <a:rPr lang="en-US" smtClean="0"/>
-              <a:t>11/20/25</a:t>
+              <a:t>2/24/26</a:t>
             </a:fld>
             <a:endParaRPr lang="en-US"/>
           </a:p>
@@ -1854,7 +1858,7 @@
           <a:p>
             <a:fld id="{4F9C66F0-894B-A64A-8A1B-2351E00312CE}" type="datetimeFigureOut">
               <a:rPr lang="en-US" smtClean="0"/>
-              <a:t>11/20/25</a:t>
+              <a:t>2/24/26</a:t>
             </a:fld>
             <a:endParaRPr lang="en-US"/>
           </a:p>
@@ -2003,7 +2007,7 @@
           <a:p>
             <a:fld id="{4F9C66F0-894B-A64A-8A1B-2351E00312CE}" type="datetimeFigureOut">
               <a:rPr lang="en-US" smtClean="0"/>
-              <a:t>11/20/25</a:t>
+              <a:t>2/24/26</a:t>
             </a:fld>
             <a:endParaRPr lang="en-US"/>
           </a:p>
@@ -2129,7 +2133,7 @@
           <a:p>
             <a:fld id="{4F9C66F0-894B-A64A-8A1B-2351E00312CE}" type="datetimeFigureOut">
               <a:rPr lang="en-US" smtClean="0"/>
-              <a:t>11/20/25</a:t>
+              <a:t>2/24/26</a:t>
             </a:fld>
             <a:endParaRPr lang="en-US"/>
           </a:p>
@@ -2380,7 +2384,7 @@
           <a:p>
             <a:fld id="{4F9C66F0-894B-A64A-8A1B-2351E00312CE}" type="datetimeFigureOut">
               <a:rPr lang="en-US" smtClean="0"/>
-              <a:t>11/20/25</a:t>
+              <a:t>2/24/26</a:t>
             </a:fld>
             <a:endParaRPr lang="en-US"/>
           </a:p>
@@ -2825,7 +2829,7 @@
           <a:p>
             <a:fld id="{4F9C66F0-894B-A64A-8A1B-2351E00312CE}" type="datetimeFigureOut">
               <a:rPr lang="en-US" smtClean="0"/>
-              <a:t>11/20/25</a:t>
+              <a:t>2/24/26</a:t>
             </a:fld>
             <a:endParaRPr lang="en-US"/>
           </a:p>
@@ -3159,7 +3163,7 @@
           <a:p>
             <a:fld id="{4F9C66F0-894B-A64A-8A1B-2351E00312CE}" type="datetimeFigureOut">
               <a:rPr lang="en-US" smtClean="0"/>
-              <a:t>11/20/25</a:t>
+              <a:t>2/24/26</a:t>
             </a:fld>
             <a:endParaRPr lang="en-US"/>
           </a:p>
@@ -3730,45 +3734,30 @@
           <a:p>
             <a:r>
               <a:rPr lang="en-US" dirty="0"/>
-              <a:t>Test:</a:t>
+              <a:t>Assignment:</a:t>
             </a:r>
           </a:p>
           <a:p>
             <a:pPr lvl="1"/>
             <a:r>
               <a:rPr lang="en-US" dirty="0"/>
-              <a:t>I’ll post a doc with outline on the weekend. </a:t>
+              <a:t>Think of some ideas, look for data, and start to explore what you can do with it…</a:t>
             </a:r>
           </a:p>
           <a:p>
             <a:pPr lvl="1"/>
             <a:r>
               <a:rPr lang="en-US" dirty="0"/>
-              <a:t>Theory post last time – Analytics types, applications of predictive. </a:t>
-            </a:r>
-          </a:p>
-          <a:p>
-            <a:pPr lvl="1"/>
-            <a:r>
-              <a:rPr lang="en-US" dirty="0"/>
-              <a:t>Some MC, a few short answer, open book, Chapters 12-16 (theoretical bits). </a:t>
-            </a:r>
-          </a:p>
-          <a:p>
-            <a:pPr lvl="1"/>
-            <a:r>
-              <a:rPr lang="en-US" dirty="0"/>
-              <a:t>It is pretty easy, there’s just not that much theory here.</a:t>
-            </a:r>
-          </a:p>
-          <a:p>
-            <a:r>
-              <a:rPr lang="en-US" dirty="0"/>
-              <a:t>Project – you should be forming your ideas, looking for data, and checking if it works…</a:t>
-            </a:r>
-          </a:p>
-          <a:p>
-            <a:endParaRPr lang="en-US" dirty="0"/>
+              <a:t>Start with simple, then look at improvements – more complex charts, adding animation/actions, adding density with color/size/shape, </a:t>
+            </a:r>
+            <a:r>
+              <a:rPr lang="en-US" dirty="0" err="1"/>
+              <a:t>etc</a:t>
+            </a:r>
+            <a:r>
+              <a:rPr lang="en-US" dirty="0"/>
+              <a:t>…</a:t>
+            </a:r>
           </a:p>
         </p:txBody>
       </p:sp>
@@ -3807,7 +3796,7 @@
           <p:cNvPr id="2" name="Title 1">
             <a:extLst>
               <a:ext uri="{FF2B5EF4-FFF2-40B4-BE49-F238E27FC236}">
-                <a16:creationId xmlns:a16="http://schemas.microsoft.com/office/drawing/2014/main" id="{7ACE6463-77A1-2206-0134-C25E28646EDC}"/>
+                <a16:creationId xmlns:a16="http://schemas.microsoft.com/office/drawing/2014/main" id="{854A8256-2106-1296-7151-413B7EBE383D}"/>
               </a:ext>
             </a:extLst>
           </p:cNvPr>
@@ -3825,7 +3814,7 @@
           <a:p>
             <a:r>
               <a:rPr lang="en-US" dirty="0"/>
-              <a:t>Detecting the Cause</a:t>
+              <a:t>This process isn’t always that easy</a:t>
             </a:r>
           </a:p>
         </p:txBody>
@@ -3835,7 +3824,7 @@
           <p:cNvPr id="3" name="Content Placeholder 2">
             <a:extLst>
               <a:ext uri="{FF2B5EF4-FFF2-40B4-BE49-F238E27FC236}">
-                <a16:creationId xmlns:a16="http://schemas.microsoft.com/office/drawing/2014/main" id="{474714D6-54A6-4099-A7F2-870A8A8C1DA3}"/>
+                <a16:creationId xmlns:a16="http://schemas.microsoft.com/office/drawing/2014/main" id="{9612B44B-7EA0-E265-76D7-125211805F35}"/>
               </a:ext>
             </a:extLst>
           </p:cNvPr>
@@ -3846,66 +3835,74 @@
             <p:ph idx="1"/>
           </p:nvPr>
         </p:nvSpPr>
-        <p:spPr/>
-        <p:txBody>
-          <a:bodyPr/>
-          <a:lstStyle/>
-          <a:p>
-            <a:endParaRPr lang="en-US" dirty="0"/>
-          </a:p>
-        </p:txBody>
-      </p:sp>
-      <p:pic>
-        <p:nvPicPr>
-          <p:cNvPr id="4" name="Picture 4" descr="Correlation is not causation">
-            <a:extLst>
-              <a:ext uri="{FF2B5EF4-FFF2-40B4-BE49-F238E27FC236}">
-                <a16:creationId xmlns:a16="http://schemas.microsoft.com/office/drawing/2014/main" id="{1D6231EA-FFB7-241D-BEF4-351D6BDDFB15}"/>
-              </a:ext>
-            </a:extLst>
-          </p:cNvPr>
-          <p:cNvPicPr>
-            <a:picLocks noChangeAspect="1" noChangeArrowheads="1"/>
-          </p:cNvPicPr>
-          <p:nvPr/>
-        </p:nvPicPr>
-        <p:blipFill>
-          <a:blip r:embed="rId2">
-            <a:extLst>
-              <a:ext uri="{28A0092B-C50C-407E-A947-70E740481C1C}">
-                <a14:useLocalDpi xmlns:a14="http://schemas.microsoft.com/office/drawing/2010/main" val="0"/>
-              </a:ext>
-            </a:extLst>
-          </a:blip>
-          <a:srcRect/>
-          <a:stretch>
-            <a:fillRect/>
-          </a:stretch>
-        </p:blipFill>
-        <p:spPr bwMode="auto">
+        <p:spPr>
           <a:xfrm>
-            <a:off x="1451579" y="1569548"/>
-            <a:ext cx="9603275" cy="5015654"/>
+            <a:off x="1451579" y="1853753"/>
+            <a:ext cx="9603275" cy="4199727"/>
           </a:xfrm>
-          <a:prstGeom prst="rect">
-            <a:avLst/>
-          </a:prstGeom>
-          <a:noFill/>
-          <a:extLst>
-            <a:ext uri="{909E8E84-426E-40DD-AFC4-6F175D3DCCD1}">
-              <a14:hiddenFill xmlns:a14="http://schemas.microsoft.com/office/drawing/2010/main">
-                <a:solidFill>
-                  <a:srgbClr val="FFFFFF"/>
-                </a:solidFill>
-              </a14:hiddenFill>
-            </a:ext>
-          </a:extLst>
         </p:spPr>
-      </p:pic>
+        <p:txBody>
+          <a:bodyPr/>
+          <a:lstStyle/>
+          <a:p>
+            <a:r>
+              <a:rPr lang="en-US" dirty="0"/>
+              <a:t>Beyond profit/sales, many companies have no clue what matters. </a:t>
+            </a:r>
+          </a:p>
+          <a:p>
+            <a:pPr lvl="1"/>
+            <a:r>
+              <a:rPr lang="en-US" dirty="0"/>
+              <a:t>Especially large corporations where departments are far separated from sales. </a:t>
+            </a:r>
+          </a:p>
+          <a:p>
+            <a:pPr lvl="1"/>
+            <a:r>
+              <a:rPr lang="en-US" dirty="0"/>
+              <a:t>Many departments have metrics that were picked arbitrarily. </a:t>
+            </a:r>
+          </a:p>
+          <a:p>
+            <a:r>
+              <a:rPr lang="en-US" dirty="0"/>
+              <a:t>Working on reporting on metrics often results in you determining what they are. </a:t>
+            </a:r>
+          </a:p>
+          <a:p>
+            <a:pPr lvl="1"/>
+            <a:r>
+              <a:rPr lang="en-US" dirty="0"/>
+              <a:t>Managers are attached to what they already achieve. </a:t>
+            </a:r>
+          </a:p>
+          <a:p>
+            <a:pPr lvl="1"/>
+            <a:r>
+              <a:rPr lang="en-US" dirty="0"/>
+              <a:t>Example – I revised compliance training (e.g. anti money laundering) assignment and reporting for ATB. The compliance people didn’t know what they needed to report, just reported the numbers that they had. </a:t>
+            </a:r>
+          </a:p>
+          <a:p>
+            <a:r>
+              <a:rPr lang="en-US" dirty="0"/>
+              <a:t>We can use some other analytics tools to help a little….</a:t>
+            </a:r>
+          </a:p>
+          <a:p>
+            <a:pPr lvl="1"/>
+            <a:r>
+              <a:rPr lang="en-US" dirty="0"/>
+              <a:t>This usually requires domain knowledge and usually many meetings. </a:t>
+            </a:r>
+          </a:p>
+        </p:txBody>
+      </p:sp>
     </p:spTree>
     <p:extLst>
       <p:ext uri="{BB962C8B-B14F-4D97-AF65-F5344CB8AC3E}">
-        <p14:creationId xmlns:p14="http://schemas.microsoft.com/office/powerpoint/2010/main" val="16576913"/>
+        <p14:creationId xmlns:p14="http://schemas.microsoft.com/office/powerpoint/2010/main" val="1189005953"/>
       </p:ext>
     </p:extLst>
   </p:cSld>
@@ -3937,7 +3934,7 @@
           <p:cNvPr id="2" name="Title 1">
             <a:extLst>
               <a:ext uri="{FF2B5EF4-FFF2-40B4-BE49-F238E27FC236}">
-                <a16:creationId xmlns:a16="http://schemas.microsoft.com/office/drawing/2014/main" id="{1F762F30-E570-0596-0586-5A4DA795F0F7}"/>
+                <a16:creationId xmlns:a16="http://schemas.microsoft.com/office/drawing/2014/main" id="{9C7C91F3-8B7A-59FD-641F-C65585EDCE35}"/>
               </a:ext>
             </a:extLst>
           </p:cNvPr>
@@ -3955,7 +3952,7 @@
           <a:p>
             <a:r>
               <a:rPr lang="en-US" dirty="0"/>
-              <a:t>Causation Analysis</a:t>
+              <a:t>Make Me Metric!</a:t>
             </a:r>
           </a:p>
         </p:txBody>
@@ -3965,7 +3962,7 @@
           <p:cNvPr id="3" name="Content Placeholder 2">
             <a:extLst>
               <a:ext uri="{FF2B5EF4-FFF2-40B4-BE49-F238E27FC236}">
-                <a16:creationId xmlns:a16="http://schemas.microsoft.com/office/drawing/2014/main" id="{DD0D6535-25C7-76D2-D56D-512FABEAEA4A}"/>
+                <a16:creationId xmlns:a16="http://schemas.microsoft.com/office/drawing/2014/main" id="{5B470111-CA26-4AA4-8D02-FE5DD0F221C8}"/>
               </a:ext>
             </a:extLst>
           </p:cNvPr>
@@ -3978,8 +3975,8 @@
         </p:nvSpPr>
         <p:spPr>
           <a:xfrm>
-            <a:off x="4046141" y="2015732"/>
-            <a:ext cx="7784352" cy="4037749"/>
+            <a:off x="1" y="1853754"/>
+            <a:ext cx="7251886" cy="4199727"/>
           </a:xfrm>
         </p:spPr>
         <p:txBody>
@@ -3988,123 +3985,123 @@
           <a:p>
             <a:r>
               <a:rPr lang="en-US" dirty="0"/>
-              <a:t>Diagnostic analytics is the branch that we often skim over. </a:t>
+              <a:t>Metrics can be constructed by math and data we have. </a:t>
             </a:r>
           </a:p>
           <a:p>
             <a:pPr lvl="1"/>
             <a:r>
               <a:rPr lang="en-US" dirty="0"/>
-              <a:t>We observe something happening and want to know why. </a:t>
-            </a:r>
-          </a:p>
-          <a:p>
-            <a:r>
-              <a:rPr lang="en-US" dirty="0"/>
-              <a:t>Two things happening together doesn’t mean one caused the other. </a:t>
+              <a:t>E.g. can calculate “sales per hour” for a salesperson at a store. </a:t>
             </a:r>
           </a:p>
           <a:p>
             <a:pPr lvl="1"/>
             <a:r>
               <a:rPr lang="en-US" dirty="0"/>
-              <a:t>Correlation is very easy to measure, but may not matter. </a:t>
+              <a:t>If you watch sports, many advanced metrics are examples (WAR, BPM, </a:t>
+            </a:r>
+            <a:r>
+              <a:rPr lang="en-US" dirty="0" err="1"/>
+              <a:t>etc</a:t>
+            </a:r>
+            <a:r>
+              <a:rPr lang="en-US" dirty="0"/>
+              <a:t>…)</a:t>
+            </a:r>
+          </a:p>
+          <a:p>
+            <a:r>
+              <a:rPr lang="en-US" dirty="0"/>
+              <a:t>Metrics also serve to simplify analysis. </a:t>
             </a:r>
           </a:p>
           <a:p>
             <a:pPr lvl="1"/>
             <a:r>
               <a:rPr lang="en-US" dirty="0"/>
-              <a:t>Coincidences, other impacts, of shared causes may occur. </a:t>
-            </a:r>
-          </a:p>
-          <a:p>
-            <a:r>
-              <a:rPr lang="en-US" dirty="0"/>
-              <a:t>Causation analysis is a branch of analytics that tries to prove causation.</a:t>
+              <a:t>The calculation combines the impact of several factors. </a:t>
             </a:r>
           </a:p>
           <a:p>
             <a:pPr lvl="1"/>
             <a:r>
               <a:rPr lang="en-US" dirty="0"/>
-              <a:t>If we can spot causes, we can embrace or avoid in advance. 	</a:t>
-            </a:r>
-          </a:p>
-          <a:p>
-            <a:pPr lvl="1"/>
-            <a:r>
-              <a:rPr lang="en-US" dirty="0"/>
-              <a:t>Focusing on markers that happen earlier is an advantage. </a:t>
-            </a:r>
-          </a:p>
-          <a:p>
-            <a:r>
-              <a:rPr lang="en-US" dirty="0"/>
-              <a:t>Causal analysis is hard, there are a few simple-</a:t>
+              <a:t>We only need to look at the metric to monitor. </a:t>
+            </a:r>
+          </a:p>
+          <a:p>
+            <a:r>
+              <a:rPr lang="en-US" dirty="0"/>
+              <a:t>Real – call center (1</a:t>
+            </a:r>
+            <a:r>
+              <a:rPr lang="en-US" baseline="30000" dirty="0"/>
+              <a:t>st</a:t>
+            </a:r>
+            <a:r>
+              <a:rPr lang="en-US" dirty="0"/>
+              <a:t> call res rate, calls/</a:t>
             </a:r>
             <a:r>
               <a:rPr lang="en-US" dirty="0" err="1"/>
-              <a:t>ish</a:t>
-            </a:r>
-            <a:r>
-              <a:rPr lang="en-US" dirty="0"/>
-              <a:t> examples…</a:t>
+              <a:t>hr</a:t>
+            </a:r>
+            <a:r>
+              <a:rPr lang="en-US" dirty="0"/>
+              <a:t>, escalation rate, </a:t>
+            </a:r>
+            <a:r>
+              <a:rPr lang="en-US" dirty="0" err="1"/>
+              <a:t>etc</a:t>
+            </a:r>
+            <a:r>
+              <a:rPr lang="en-US" dirty="0"/>
+              <a:t>…)</a:t>
+            </a:r>
+          </a:p>
+          <a:p>
+            <a:r>
+              <a:rPr lang="en-US" dirty="0"/>
+              <a:t>Limited by relevance of metric – it is hard to summarize an entire business into one number. </a:t>
             </a:r>
           </a:p>
         </p:txBody>
       </p:sp>
       <p:pic>
         <p:nvPicPr>
-          <p:cNvPr id="5122" name="Picture 2" descr="Correlation vs Causation">
+          <p:cNvPr id="5" name="Picture 4" descr="Everything You Need to Know About KPI Visualization - Atlan | Humans of Data">
             <a:extLst>
               <a:ext uri="{FF2B5EF4-FFF2-40B4-BE49-F238E27FC236}">
-                <a16:creationId xmlns:a16="http://schemas.microsoft.com/office/drawing/2014/main" id="{B8DED405-214C-026E-090E-C76458BE7110}"/>
+                <a16:creationId xmlns:a16="http://schemas.microsoft.com/office/drawing/2014/main" id="{AEDDBFAA-5CEB-4C26-42AD-724601549183}"/>
               </a:ext>
             </a:extLst>
           </p:cNvPr>
           <p:cNvPicPr>
-            <a:picLocks noChangeAspect="1" noChangeArrowheads="1"/>
+            <a:picLocks noChangeAspect="1"/>
           </p:cNvPicPr>
           <p:nvPr/>
         </p:nvPicPr>
-        <p:blipFill rotWithShape="1">
-          <a:blip r:embed="rId2">
-            <a:extLst>
-              <a:ext uri="{28A0092B-C50C-407E-A947-70E740481C1C}">
-                <a14:useLocalDpi xmlns:a14="http://schemas.microsoft.com/office/drawing/2010/main" val="0"/>
-              </a:ext>
-            </a:extLst>
-          </a:blip>
-          <a:srcRect b="9458"/>
+        <p:blipFill>
+          <a:blip r:embed="rId2"/>
           <a:stretch>
             <a:fillRect/>
           </a:stretch>
         </p:blipFill>
-        <p:spPr bwMode="auto">
+        <p:spPr>
           <a:xfrm>
-            <a:off x="361507" y="1502880"/>
-            <a:ext cx="3684633" cy="5004246"/>
+            <a:off x="7251887" y="2015732"/>
+            <a:ext cx="4846496" cy="2801880"/>
           </a:xfrm>
           <a:prstGeom prst="rect">
             <a:avLst/>
           </a:prstGeom>
-          <a:noFill/>
-          <a:extLst>
-            <a:ext uri="{909E8E84-426E-40DD-AFC4-6F175D3DCCD1}">
-              <a14:hiddenFill xmlns:a14="http://schemas.microsoft.com/office/drawing/2010/main">
-                <a:solidFill>
-                  <a:srgbClr val="FFFFFF"/>
-                </a:solidFill>
-              </a14:hiddenFill>
-            </a:ext>
-          </a:extLst>
         </p:spPr>
       </p:pic>
     </p:spTree>
     <p:extLst>
       <p:ext uri="{BB962C8B-B14F-4D97-AF65-F5344CB8AC3E}">
-        <p14:creationId xmlns:p14="http://schemas.microsoft.com/office/powerpoint/2010/main" val="1655612915"/>
+        <p14:creationId xmlns:p14="http://schemas.microsoft.com/office/powerpoint/2010/main" val="1603624903"/>
       </p:ext>
     </p:extLst>
   </p:cSld>
@@ -4136,1383 +4133,6 @@
           <p:cNvPr id="2" name="Title 1">
             <a:extLst>
               <a:ext uri="{FF2B5EF4-FFF2-40B4-BE49-F238E27FC236}">
-                <a16:creationId xmlns:a16="http://schemas.microsoft.com/office/drawing/2014/main" id="{D98C3621-E7B9-339E-DEF2-17FEFA04F1F1}"/>
-              </a:ext>
-            </a:extLst>
-          </p:cNvPr>
-          <p:cNvSpPr>
-            <a:spLocks noGrp="1"/>
-          </p:cNvSpPr>
-          <p:nvPr>
-            <p:ph type="title"/>
-          </p:nvPr>
-        </p:nvSpPr>
-        <p:spPr/>
-        <p:txBody>
-          <a:bodyPr/>
-          <a:lstStyle/>
-          <a:p>
-            <a:r>
-              <a:rPr lang="en-US" dirty="0"/>
-              <a:t>Causal Inference – did this Cause that? </a:t>
-            </a:r>
-          </a:p>
-        </p:txBody>
-      </p:sp>
-      <p:sp>
-        <p:nvSpPr>
-          <p:cNvPr id="3" name="Content Placeholder 2">
-            <a:extLst>
-              <a:ext uri="{FF2B5EF4-FFF2-40B4-BE49-F238E27FC236}">
-                <a16:creationId xmlns:a16="http://schemas.microsoft.com/office/drawing/2014/main" id="{D4DCBDB5-C987-EA80-F978-AF2515EEE413}"/>
-              </a:ext>
-            </a:extLst>
-          </p:cNvPr>
-          <p:cNvSpPr>
-            <a:spLocks noGrp="1"/>
-          </p:cNvSpPr>
-          <p:nvPr>
-            <p:ph idx="1"/>
-          </p:nvPr>
-        </p:nvSpPr>
-        <p:spPr>
-          <a:xfrm>
-            <a:off x="963826" y="2015732"/>
-            <a:ext cx="6960193" cy="4037749"/>
-          </a:xfrm>
-        </p:spPr>
-        <p:txBody>
-          <a:bodyPr/>
-          <a:lstStyle/>
-          <a:p>
-            <a:r>
-              <a:rPr lang="en-US" dirty="0"/>
-              <a:t>Sequencing – if Thing A always occurs directly before Thing B. </a:t>
-            </a:r>
-          </a:p>
-          <a:p>
-            <a:pPr lvl="1"/>
-            <a:r>
-              <a:rPr lang="en-US" dirty="0"/>
-              <a:t>With time-based data we can track this on a massive scale easily. </a:t>
-            </a:r>
-          </a:p>
-          <a:p>
-            <a:pPr lvl="1"/>
-            <a:r>
-              <a:rPr lang="en-US" dirty="0"/>
-              <a:t>E.g. Amazon can track if suggesting products yields sales over billions of examples. </a:t>
-            </a:r>
-          </a:p>
-          <a:p>
-            <a:r>
-              <a:rPr lang="en-US" dirty="0"/>
-              <a:t>A/B testing – change one variable, observe results. </a:t>
-            </a:r>
-          </a:p>
-          <a:p>
-            <a:pPr lvl="1"/>
-            <a:r>
-              <a:rPr lang="en-US" dirty="0"/>
-              <a:t>This is something that is made much easier with online business. </a:t>
-            </a:r>
-          </a:p>
-          <a:p>
-            <a:pPr lvl="1"/>
-            <a:r>
-              <a:rPr lang="en-US" dirty="0"/>
-              <a:t>Change one variable, like which ad is shown, and measure results, like click rate. </a:t>
-            </a:r>
-          </a:p>
-          <a:p>
-            <a:pPr lvl="1"/>
-            <a:r>
-              <a:rPr lang="en-US" dirty="0"/>
-              <a:t>If everything else is controlled, can draw inference from the change. </a:t>
-            </a:r>
-          </a:p>
-        </p:txBody>
-      </p:sp>
-      <p:pic>
-        <p:nvPicPr>
-          <p:cNvPr id="6146" name="Picture 2">
-            <a:extLst>
-              <a:ext uri="{FF2B5EF4-FFF2-40B4-BE49-F238E27FC236}">
-                <a16:creationId xmlns:a16="http://schemas.microsoft.com/office/drawing/2014/main" id="{2F1BE797-3DFE-15C4-5BFD-7E617344E214}"/>
-              </a:ext>
-            </a:extLst>
-          </p:cNvPr>
-          <p:cNvPicPr>
-            <a:picLocks noChangeAspect="1" noChangeArrowheads="1"/>
-          </p:cNvPicPr>
-          <p:nvPr/>
-        </p:nvPicPr>
-        <p:blipFill>
-          <a:blip r:embed="rId2">
-            <a:extLst>
-              <a:ext uri="{28A0092B-C50C-407E-A947-70E740481C1C}">
-                <a14:useLocalDpi xmlns:a14="http://schemas.microsoft.com/office/drawing/2010/main" val="0"/>
-              </a:ext>
-            </a:extLst>
-          </a:blip>
-          <a:srcRect/>
-          <a:stretch>
-            <a:fillRect/>
-          </a:stretch>
-        </p:blipFill>
-        <p:spPr bwMode="auto">
-          <a:xfrm>
-            <a:off x="7924019" y="2204308"/>
-            <a:ext cx="4161575" cy="2449384"/>
-          </a:xfrm>
-          <a:prstGeom prst="rect">
-            <a:avLst/>
-          </a:prstGeom>
-          <a:noFill/>
-          <a:extLst>
-            <a:ext uri="{909E8E84-426E-40DD-AFC4-6F175D3DCCD1}">
-              <a14:hiddenFill xmlns:a14="http://schemas.microsoft.com/office/drawing/2010/main">
-                <a:solidFill>
-                  <a:srgbClr val="FFFFFF"/>
-                </a:solidFill>
-              </a14:hiddenFill>
-            </a:ext>
-          </a:extLst>
-        </p:spPr>
-      </p:pic>
-    </p:spTree>
-    <p:extLst>
-      <p:ext uri="{BB962C8B-B14F-4D97-AF65-F5344CB8AC3E}">
-        <p14:creationId xmlns:p14="http://schemas.microsoft.com/office/powerpoint/2010/main" val="4008826286"/>
-      </p:ext>
-    </p:extLst>
-  </p:cSld>
-  <p:clrMapOvr>
-    <a:masterClrMapping/>
-  </p:clrMapOvr>
-</p:sld>
-</file>
-
-<file path=ppt/slides/slide13.xml><?xml version="1.0" encoding="utf-8"?>
-<p:sld xmlns:a="http://schemas.openxmlformats.org/drawingml/2006/main" xmlns:r="http://schemas.openxmlformats.org/officeDocument/2006/relationships" xmlns:p="http://schemas.openxmlformats.org/presentationml/2006/main">
-  <p:cSld>
-    <p:spTree>
-      <p:nvGrpSpPr>
-        <p:cNvPr id="1" name=""/>
-        <p:cNvGrpSpPr/>
-        <p:nvPr/>
-      </p:nvGrpSpPr>
-      <p:grpSpPr>
-        <a:xfrm>
-          <a:off x="0" y="0"/>
-          <a:ext cx="0" cy="0"/>
-          <a:chOff x="0" y="0"/>
-          <a:chExt cx="0" cy="0"/>
-        </a:xfrm>
-      </p:grpSpPr>
-      <p:sp>
-        <p:nvSpPr>
-          <p:cNvPr id="2" name="Title 1">
-            <a:extLst>
-              <a:ext uri="{FF2B5EF4-FFF2-40B4-BE49-F238E27FC236}">
-                <a16:creationId xmlns:a16="http://schemas.microsoft.com/office/drawing/2014/main" id="{52D939F7-6442-0224-9066-BF36E96B488F}"/>
-              </a:ext>
-            </a:extLst>
-          </p:cNvPr>
-          <p:cNvSpPr>
-            <a:spLocks noGrp="1"/>
-          </p:cNvSpPr>
-          <p:nvPr>
-            <p:ph type="title"/>
-          </p:nvPr>
-        </p:nvSpPr>
-        <p:spPr/>
-        <p:txBody>
-          <a:bodyPr/>
-          <a:lstStyle/>
-          <a:p>
-            <a:r>
-              <a:rPr lang="en-US" dirty="0"/>
-              <a:t>KPIs and </a:t>
-            </a:r>
-            <a:r>
-              <a:rPr lang="en-US" dirty="0" err="1"/>
-              <a:t>Dashbaords</a:t>
-            </a:r>
-            <a:endParaRPr lang="en-US" dirty="0"/>
-          </a:p>
-        </p:txBody>
-      </p:sp>
-      <p:sp>
-        <p:nvSpPr>
-          <p:cNvPr id="3" name="Content Placeholder 2">
-            <a:extLst>
-              <a:ext uri="{FF2B5EF4-FFF2-40B4-BE49-F238E27FC236}">
-                <a16:creationId xmlns:a16="http://schemas.microsoft.com/office/drawing/2014/main" id="{521B05AE-0129-A6DF-FEE2-A88E14802357}"/>
-              </a:ext>
-            </a:extLst>
-          </p:cNvPr>
-          <p:cNvSpPr>
-            <a:spLocks noGrp="1"/>
-          </p:cNvSpPr>
-          <p:nvPr>
-            <p:ph idx="1"/>
-          </p:nvPr>
-        </p:nvSpPr>
-        <p:spPr>
-          <a:xfrm>
-            <a:off x="6804454" y="2015732"/>
-            <a:ext cx="5288692" cy="3450613"/>
-          </a:xfrm>
-        </p:spPr>
-        <p:txBody>
-          <a:bodyPr/>
-          <a:lstStyle/>
-          <a:p>
-            <a:r>
-              <a:rPr lang="en-US" dirty="0"/>
-              <a:t>Modern dashboards are an easy way to show KPIs to users. </a:t>
-            </a:r>
-          </a:p>
-          <a:p>
-            <a:r>
-              <a:rPr lang="en-US" dirty="0"/>
-              <a:t>Can make one dashboard and allow tailoring. </a:t>
-            </a:r>
-          </a:p>
-          <a:p>
-            <a:pPr lvl="1"/>
-            <a:r>
-              <a:rPr lang="en-US" dirty="0"/>
-              <a:t>Parameters, filters, interactivity….</a:t>
-            </a:r>
-          </a:p>
-          <a:p>
-            <a:r>
-              <a:rPr lang="en-US" dirty="0"/>
-              <a:t>E.g. at ATB we used to make ~15 different reports on the same thing for different areas. Change to 2 base reports with options. </a:t>
-            </a:r>
-          </a:p>
-        </p:txBody>
-      </p:sp>
-      <p:pic>
-        <p:nvPicPr>
-          <p:cNvPr id="8194" name="Picture 2" descr="4 essential IT KPIs for an effective IT dashboard - Work Life by Atlassian">
-            <a:extLst>
-              <a:ext uri="{FF2B5EF4-FFF2-40B4-BE49-F238E27FC236}">
-                <a16:creationId xmlns:a16="http://schemas.microsoft.com/office/drawing/2014/main" id="{761C6D6E-6FEA-B5F0-D3E5-764C51740C59}"/>
-              </a:ext>
-            </a:extLst>
-          </p:cNvPr>
-          <p:cNvPicPr>
-            <a:picLocks noChangeAspect="1" noChangeArrowheads="1"/>
-          </p:cNvPicPr>
-          <p:nvPr/>
-        </p:nvPicPr>
-        <p:blipFill>
-          <a:blip r:embed="rId2">
-            <a:extLst>
-              <a:ext uri="{28A0092B-C50C-407E-A947-70E740481C1C}">
-                <a14:useLocalDpi xmlns:a14="http://schemas.microsoft.com/office/drawing/2010/main" val="0"/>
-              </a:ext>
-            </a:extLst>
-          </a:blip>
-          <a:srcRect/>
-          <a:stretch>
-            <a:fillRect/>
-          </a:stretch>
-        </p:blipFill>
-        <p:spPr bwMode="auto">
-          <a:xfrm>
-            <a:off x="98854" y="2185141"/>
-            <a:ext cx="6705600" cy="3281204"/>
-          </a:xfrm>
-          <a:prstGeom prst="rect">
-            <a:avLst/>
-          </a:prstGeom>
-          <a:noFill/>
-          <a:extLst>
-            <a:ext uri="{909E8E84-426E-40DD-AFC4-6F175D3DCCD1}">
-              <a14:hiddenFill xmlns:a14="http://schemas.microsoft.com/office/drawing/2010/main">
-                <a:solidFill>
-                  <a:srgbClr val="FFFFFF"/>
-                </a:solidFill>
-              </a14:hiddenFill>
-            </a:ext>
-          </a:extLst>
-        </p:spPr>
-      </p:pic>
-    </p:spTree>
-    <p:extLst>
-      <p:ext uri="{BB962C8B-B14F-4D97-AF65-F5344CB8AC3E}">
-        <p14:creationId xmlns:p14="http://schemas.microsoft.com/office/powerpoint/2010/main" val="2716706350"/>
-      </p:ext>
-    </p:extLst>
-  </p:cSld>
-  <p:clrMapOvr>
-    <a:masterClrMapping/>
-  </p:clrMapOvr>
-</p:sld>
-</file>
-
-<file path=ppt/slides/slide14.xml><?xml version="1.0" encoding="utf-8"?>
-<p:sld xmlns:a="http://schemas.openxmlformats.org/drawingml/2006/main" xmlns:r="http://schemas.openxmlformats.org/officeDocument/2006/relationships" xmlns:p="http://schemas.openxmlformats.org/presentationml/2006/main">
-  <p:cSld>
-    <p:spTree>
-      <p:nvGrpSpPr>
-        <p:cNvPr id="1" name=""/>
-        <p:cNvGrpSpPr/>
-        <p:nvPr/>
-      </p:nvGrpSpPr>
-      <p:grpSpPr>
-        <a:xfrm>
-          <a:off x="0" y="0"/>
-          <a:ext cx="0" cy="0"/>
-          <a:chOff x="0" y="0"/>
-          <a:chExt cx="0" cy="0"/>
-        </a:xfrm>
-      </p:grpSpPr>
-      <p:sp>
-        <p:nvSpPr>
-          <p:cNvPr id="2" name="Title 1">
-            <a:extLst>
-              <a:ext uri="{FF2B5EF4-FFF2-40B4-BE49-F238E27FC236}">
-                <a16:creationId xmlns:a16="http://schemas.microsoft.com/office/drawing/2014/main" id="{132AE25A-96D0-5C32-CFF1-7040E37A4A35}"/>
-              </a:ext>
-            </a:extLst>
-          </p:cNvPr>
-          <p:cNvSpPr>
-            <a:spLocks noGrp="1"/>
-          </p:cNvSpPr>
-          <p:nvPr>
-            <p:ph type="title"/>
-          </p:nvPr>
-        </p:nvSpPr>
-        <p:spPr/>
-        <p:txBody>
-          <a:bodyPr/>
-          <a:lstStyle/>
-          <a:p>
-            <a:r>
-              <a:rPr lang="en-US" dirty="0"/>
-              <a:t>In Tableau…</a:t>
-            </a:r>
-          </a:p>
-        </p:txBody>
-      </p:sp>
-      <p:sp>
-        <p:nvSpPr>
-          <p:cNvPr id="3" name="Content Placeholder 2">
-            <a:extLst>
-              <a:ext uri="{FF2B5EF4-FFF2-40B4-BE49-F238E27FC236}">
-                <a16:creationId xmlns:a16="http://schemas.microsoft.com/office/drawing/2014/main" id="{73401AB1-A357-F1A4-8318-9C79CC277616}"/>
-              </a:ext>
-            </a:extLst>
-          </p:cNvPr>
-          <p:cNvSpPr>
-            <a:spLocks noGrp="1"/>
-          </p:cNvSpPr>
-          <p:nvPr>
-            <p:ph idx="1"/>
-          </p:nvPr>
-        </p:nvSpPr>
-        <p:spPr>
-          <a:xfrm>
-            <a:off x="1451579" y="2015732"/>
-            <a:ext cx="9603275" cy="4037749"/>
-          </a:xfrm>
-        </p:spPr>
-        <p:txBody>
-          <a:bodyPr/>
-          <a:lstStyle/>
-          <a:p>
-            <a:r>
-              <a:rPr lang="en-US" dirty="0"/>
-              <a:t>In Tableau, we can calculate almost any metric via a calculation. </a:t>
-            </a:r>
-          </a:p>
-          <a:p>
-            <a:r>
-              <a:rPr lang="en-US" dirty="0"/>
-              <a:t>We can manipulate the customizations with:</a:t>
-            </a:r>
-          </a:p>
-          <a:p>
-            <a:pPr lvl="1"/>
-            <a:r>
-              <a:rPr lang="en-US" dirty="0"/>
-              <a:t>Parameters. </a:t>
-            </a:r>
-          </a:p>
-          <a:p>
-            <a:pPr lvl="1"/>
-            <a:r>
-              <a:rPr lang="en-US" dirty="0"/>
-              <a:t>Filters. </a:t>
-            </a:r>
-          </a:p>
-          <a:p>
-            <a:pPr lvl="1"/>
-            <a:r>
-              <a:rPr lang="en-US" dirty="0"/>
-              <a:t>Interactions. </a:t>
-            </a:r>
-          </a:p>
-          <a:p>
-            <a:r>
-              <a:rPr lang="en-US" dirty="0"/>
-              <a:t>Some other tools – groups and sets, can help splitting “care vs. not care”. </a:t>
-            </a:r>
-          </a:p>
-          <a:p>
-            <a:endParaRPr lang="en-US" dirty="0"/>
-          </a:p>
-          <a:p>
-            <a:r>
-              <a:rPr lang="en-US" dirty="0"/>
-              <a:t>Lastly, extensions…. Let’s try some. </a:t>
-            </a:r>
-          </a:p>
-        </p:txBody>
-      </p:sp>
-    </p:spTree>
-    <p:extLst>
-      <p:ext uri="{BB962C8B-B14F-4D97-AF65-F5344CB8AC3E}">
-        <p14:creationId xmlns:p14="http://schemas.microsoft.com/office/powerpoint/2010/main" val="1226656858"/>
-      </p:ext>
-    </p:extLst>
-  </p:cSld>
-  <p:clrMapOvr>
-    <a:masterClrMapping/>
-  </p:clrMapOvr>
-</p:sld>
-</file>
-
-<file path=ppt/slides/slide2.xml><?xml version="1.0" encoding="utf-8"?>
-<p:sld xmlns:a="http://schemas.openxmlformats.org/drawingml/2006/main" xmlns:r="http://schemas.openxmlformats.org/officeDocument/2006/relationships" xmlns:p="http://schemas.openxmlformats.org/presentationml/2006/main">
-  <p:cSld>
-    <p:spTree>
-      <p:nvGrpSpPr>
-        <p:cNvPr id="1" name=""/>
-        <p:cNvGrpSpPr/>
-        <p:nvPr/>
-      </p:nvGrpSpPr>
-      <p:grpSpPr>
-        <a:xfrm>
-          <a:off x="0" y="0"/>
-          <a:ext cx="0" cy="0"/>
-          <a:chOff x="0" y="0"/>
-          <a:chExt cx="0" cy="0"/>
-        </a:xfrm>
-      </p:grpSpPr>
-      <p:sp>
-        <p:nvSpPr>
-          <p:cNvPr id="2" name="Title 1">
-            <a:extLst>
-              <a:ext uri="{FF2B5EF4-FFF2-40B4-BE49-F238E27FC236}">
-                <a16:creationId xmlns:a16="http://schemas.microsoft.com/office/drawing/2014/main" id="{FB9710D0-29DE-0059-171F-442FCB72F931}"/>
-              </a:ext>
-            </a:extLst>
-          </p:cNvPr>
-          <p:cNvSpPr>
-            <a:spLocks noGrp="1"/>
-          </p:cNvSpPr>
-          <p:nvPr>
-            <p:ph type="ctrTitle"/>
-          </p:nvPr>
-        </p:nvSpPr>
-        <p:spPr/>
-        <p:txBody>
-          <a:bodyPr/>
-          <a:lstStyle/>
-          <a:p>
-            <a:r>
-              <a:rPr lang="en-US" dirty="0"/>
-              <a:t>Comparison and KPI</a:t>
-            </a:r>
-          </a:p>
-        </p:txBody>
-      </p:sp>
-      <p:sp>
-        <p:nvSpPr>
-          <p:cNvPr id="3" name="Subtitle 2">
-            <a:extLst>
-              <a:ext uri="{FF2B5EF4-FFF2-40B4-BE49-F238E27FC236}">
-                <a16:creationId xmlns:a16="http://schemas.microsoft.com/office/drawing/2014/main" id="{C8745083-32F5-092C-05D7-E3AD85E84AD3}"/>
-              </a:ext>
-            </a:extLst>
-          </p:cNvPr>
-          <p:cNvSpPr>
-            <a:spLocks noGrp="1"/>
-          </p:cNvSpPr>
-          <p:nvPr>
-            <p:ph type="subTitle" idx="1"/>
-          </p:nvPr>
-        </p:nvSpPr>
-        <p:spPr/>
-        <p:txBody>
-          <a:bodyPr/>
-          <a:lstStyle/>
-          <a:p>
-            <a:endParaRPr lang="en-US"/>
-          </a:p>
-        </p:txBody>
-      </p:sp>
-    </p:spTree>
-    <p:extLst>
-      <p:ext uri="{BB962C8B-B14F-4D97-AF65-F5344CB8AC3E}">
-        <p14:creationId xmlns:p14="http://schemas.microsoft.com/office/powerpoint/2010/main" val="1509454297"/>
-      </p:ext>
-    </p:extLst>
-  </p:cSld>
-  <p:clrMapOvr>
-    <a:masterClrMapping/>
-  </p:clrMapOvr>
-</p:sld>
-</file>
-
-<file path=ppt/slides/slide3.xml><?xml version="1.0" encoding="utf-8"?>
-<p:sld xmlns:a="http://schemas.openxmlformats.org/drawingml/2006/main" xmlns:r="http://schemas.openxmlformats.org/officeDocument/2006/relationships" xmlns:p="http://schemas.openxmlformats.org/presentationml/2006/main">
-  <p:cSld>
-    <p:spTree>
-      <p:nvGrpSpPr>
-        <p:cNvPr id="1" name=""/>
-        <p:cNvGrpSpPr/>
-        <p:nvPr/>
-      </p:nvGrpSpPr>
-      <p:grpSpPr>
-        <a:xfrm>
-          <a:off x="0" y="0"/>
-          <a:ext cx="0" cy="0"/>
-          <a:chOff x="0" y="0"/>
-          <a:chExt cx="0" cy="0"/>
-        </a:xfrm>
-      </p:grpSpPr>
-      <p:sp>
-        <p:nvSpPr>
-          <p:cNvPr id="2" name="Title 1">
-            <a:extLst>
-              <a:ext uri="{FF2B5EF4-FFF2-40B4-BE49-F238E27FC236}">
-                <a16:creationId xmlns:a16="http://schemas.microsoft.com/office/drawing/2014/main" id="{5F1BE3E2-1AC3-005C-982B-70302C07EE16}"/>
-              </a:ext>
-            </a:extLst>
-          </p:cNvPr>
-          <p:cNvSpPr>
-            <a:spLocks noGrp="1"/>
-          </p:cNvSpPr>
-          <p:nvPr>
-            <p:ph type="title"/>
-          </p:nvPr>
-        </p:nvSpPr>
-        <p:spPr/>
-        <p:txBody>
-          <a:bodyPr/>
-          <a:lstStyle/>
-          <a:p>
-            <a:r>
-              <a:rPr lang="en-US" dirty="0"/>
-              <a:t>Compare things</a:t>
-            </a:r>
-          </a:p>
-        </p:txBody>
-      </p:sp>
-      <p:sp>
-        <p:nvSpPr>
-          <p:cNvPr id="3" name="Content Placeholder 2">
-            <a:extLst>
-              <a:ext uri="{FF2B5EF4-FFF2-40B4-BE49-F238E27FC236}">
-                <a16:creationId xmlns:a16="http://schemas.microsoft.com/office/drawing/2014/main" id="{EB5E9E70-9629-C5C1-5500-100167C1ACA6}"/>
-              </a:ext>
-            </a:extLst>
-          </p:cNvPr>
-          <p:cNvSpPr>
-            <a:spLocks noGrp="1"/>
-          </p:cNvSpPr>
-          <p:nvPr>
-            <p:ph idx="1"/>
-          </p:nvPr>
-        </p:nvSpPr>
-        <p:spPr>
-          <a:xfrm>
-            <a:off x="1451579" y="2015732"/>
-            <a:ext cx="9603275" cy="3864073"/>
-          </a:xfrm>
-        </p:spPr>
-        <p:txBody>
-          <a:bodyPr/>
-          <a:lstStyle/>
-          <a:p>
-            <a:r>
-              <a:rPr lang="en-US" dirty="0"/>
-              <a:t>One important tool of visualizations is to allow comparison. </a:t>
-            </a:r>
-          </a:p>
-          <a:p>
-            <a:pPr lvl="1"/>
-            <a:r>
-              <a:rPr lang="en-US" dirty="0"/>
-              <a:t>We can let users customize some details. </a:t>
-            </a:r>
-          </a:p>
-          <a:p>
-            <a:pPr lvl="1"/>
-            <a:r>
-              <a:rPr lang="en-US" dirty="0"/>
-              <a:t>Tableau can recalculate things on the fly. </a:t>
-            </a:r>
-          </a:p>
-          <a:p>
-            <a:r>
-              <a:rPr lang="en-US" dirty="0"/>
-              <a:t>On ‘business’ dashboards, this is common. </a:t>
-            </a:r>
-          </a:p>
-          <a:p>
-            <a:pPr lvl="1"/>
-            <a:r>
-              <a:rPr lang="en-US" dirty="0"/>
-              <a:t>Focus on one store/product/department. </a:t>
-            </a:r>
-          </a:p>
-          <a:p>
-            <a:r>
-              <a:rPr lang="en-US" dirty="0"/>
-              <a:t>Facilitates KPI – key performance indicators. </a:t>
-            </a:r>
-          </a:p>
-          <a:p>
-            <a:pPr lvl="1"/>
-            <a:r>
-              <a:rPr lang="en-US" dirty="0"/>
-              <a:t>Identify core values, monitor them. </a:t>
-            </a:r>
-          </a:p>
-        </p:txBody>
-      </p:sp>
-      <p:pic>
-        <p:nvPicPr>
-          <p:cNvPr id="1026" name="Picture 2" descr="How to Create Persistent Comparison Sets Across Tableau Dashboards">
-            <a:extLst>
-              <a:ext uri="{FF2B5EF4-FFF2-40B4-BE49-F238E27FC236}">
-                <a16:creationId xmlns:a16="http://schemas.microsoft.com/office/drawing/2014/main" id="{BA2CE2C5-65AA-9DAF-3D07-6F8DDAD1FDC7}"/>
-              </a:ext>
-            </a:extLst>
-          </p:cNvPr>
-          <p:cNvPicPr>
-            <a:picLocks noChangeAspect="1" noChangeArrowheads="1"/>
-          </p:cNvPicPr>
-          <p:nvPr/>
-        </p:nvPicPr>
-        <p:blipFill>
-          <a:blip r:embed="rId2">
-            <a:extLst>
-              <a:ext uri="{28A0092B-C50C-407E-A947-70E740481C1C}">
-                <a14:useLocalDpi xmlns:a14="http://schemas.microsoft.com/office/drawing/2010/main" val="0"/>
-              </a:ext>
-            </a:extLst>
-          </a:blip>
-          <a:srcRect/>
-          <a:stretch>
-            <a:fillRect/>
-          </a:stretch>
-        </p:blipFill>
-        <p:spPr bwMode="auto">
-          <a:xfrm>
-            <a:off x="6560289" y="2543654"/>
-            <a:ext cx="5514753" cy="4089209"/>
-          </a:xfrm>
-          <a:prstGeom prst="rect">
-            <a:avLst/>
-          </a:prstGeom>
-          <a:noFill/>
-          <a:extLst>
-            <a:ext uri="{909E8E84-426E-40DD-AFC4-6F175D3DCCD1}">
-              <a14:hiddenFill xmlns:a14="http://schemas.microsoft.com/office/drawing/2010/main">
-                <a:solidFill>
-                  <a:srgbClr val="FFFFFF"/>
-                </a:solidFill>
-              </a14:hiddenFill>
-            </a:ext>
-          </a:extLst>
-        </p:spPr>
-      </p:pic>
-    </p:spTree>
-    <p:extLst>
-      <p:ext uri="{BB962C8B-B14F-4D97-AF65-F5344CB8AC3E}">
-        <p14:creationId xmlns:p14="http://schemas.microsoft.com/office/powerpoint/2010/main" val="132175247"/>
-      </p:ext>
-    </p:extLst>
-  </p:cSld>
-  <p:clrMapOvr>
-    <a:masterClrMapping/>
-  </p:clrMapOvr>
-</p:sld>
-</file>
-
-<file path=ppt/slides/slide4.xml><?xml version="1.0" encoding="utf-8"?>
-<p:sld xmlns:a="http://schemas.openxmlformats.org/drawingml/2006/main" xmlns:r="http://schemas.openxmlformats.org/officeDocument/2006/relationships" xmlns:p="http://schemas.openxmlformats.org/presentationml/2006/main">
-  <p:cSld>
-    <p:spTree>
-      <p:nvGrpSpPr>
-        <p:cNvPr id="1" name=""/>
-        <p:cNvGrpSpPr/>
-        <p:nvPr/>
-      </p:nvGrpSpPr>
-      <p:grpSpPr>
-        <a:xfrm>
-          <a:off x="0" y="0"/>
-          <a:ext cx="0" cy="0"/>
-          <a:chOff x="0" y="0"/>
-          <a:chExt cx="0" cy="0"/>
-        </a:xfrm>
-      </p:grpSpPr>
-      <p:sp>
-        <p:nvSpPr>
-          <p:cNvPr id="2" name="Title 1">
-            <a:extLst>
-              <a:ext uri="{FF2B5EF4-FFF2-40B4-BE49-F238E27FC236}">
-                <a16:creationId xmlns:a16="http://schemas.microsoft.com/office/drawing/2014/main" id="{99D303A1-CBA4-8323-8EB1-EC1673CC35D2}"/>
-              </a:ext>
-            </a:extLst>
-          </p:cNvPr>
-          <p:cNvSpPr>
-            <a:spLocks noGrp="1"/>
-          </p:cNvSpPr>
-          <p:nvPr>
-            <p:ph type="title"/>
-          </p:nvPr>
-        </p:nvSpPr>
-        <p:spPr/>
-        <p:txBody>
-          <a:bodyPr/>
-          <a:lstStyle/>
-          <a:p>
-            <a:r>
-              <a:rPr lang="en-US" dirty="0"/>
-              <a:t>Key Performance Indicators</a:t>
-            </a:r>
-          </a:p>
-        </p:txBody>
-      </p:sp>
-      <p:sp>
-        <p:nvSpPr>
-          <p:cNvPr id="3" name="Content Placeholder 2">
-            <a:extLst>
-              <a:ext uri="{FF2B5EF4-FFF2-40B4-BE49-F238E27FC236}">
-                <a16:creationId xmlns:a16="http://schemas.microsoft.com/office/drawing/2014/main" id="{EE5D0096-5553-EC5A-63E3-6F73CA7FE010}"/>
-              </a:ext>
-            </a:extLst>
-          </p:cNvPr>
-          <p:cNvSpPr>
-            <a:spLocks noGrp="1"/>
-          </p:cNvSpPr>
-          <p:nvPr>
-            <p:ph idx="1"/>
-          </p:nvPr>
-        </p:nvSpPr>
-        <p:spPr>
-          <a:xfrm>
-            <a:off x="6253215" y="2015732"/>
-            <a:ext cx="5804105" cy="3976577"/>
-          </a:xfrm>
-        </p:spPr>
-        <p:txBody>
-          <a:bodyPr/>
-          <a:lstStyle/>
-          <a:p>
-            <a:r>
-              <a:rPr lang="en-US" dirty="0"/>
-              <a:t>KPIs are metrics that organizations identify as being critical for success. </a:t>
-            </a:r>
-          </a:p>
-          <a:p>
-            <a:r>
-              <a:rPr lang="en-US" dirty="0"/>
-              <a:t>Specific – we can know definitively if we </a:t>
-            </a:r>
-            <a:r>
-              <a:rPr lang="en-US" dirty="0" err="1"/>
-              <a:t>acheive</a:t>
-            </a:r>
-            <a:r>
-              <a:rPr lang="en-US" dirty="0"/>
-              <a:t> it. </a:t>
-            </a:r>
-          </a:p>
-          <a:p>
-            <a:r>
-              <a:rPr lang="en-US" dirty="0"/>
-              <a:t>Time bound – we have limits on when it can occur. </a:t>
-            </a:r>
-          </a:p>
-          <a:p>
-            <a:r>
-              <a:rPr lang="en-US" dirty="0"/>
-              <a:t>Measurable – it is objective. </a:t>
-            </a:r>
-          </a:p>
-          <a:p>
-            <a:r>
-              <a:rPr lang="en-US" dirty="0"/>
-              <a:t>Attainable – it is realistic to achieve. </a:t>
-            </a:r>
-          </a:p>
-          <a:p>
-            <a:r>
-              <a:rPr lang="en-US" dirty="0"/>
-              <a:t>Relevant – it matters to success. </a:t>
-            </a:r>
-          </a:p>
-        </p:txBody>
-      </p:sp>
-      <p:pic>
-        <p:nvPicPr>
-          <p:cNvPr id="2050" name="Picture 2" descr="What are KPIs and how should you use them to increase sales?">
-            <a:extLst>
-              <a:ext uri="{FF2B5EF4-FFF2-40B4-BE49-F238E27FC236}">
-                <a16:creationId xmlns:a16="http://schemas.microsoft.com/office/drawing/2014/main" id="{0CE4E531-3508-27D9-6AAF-2AD3F926F12A}"/>
-              </a:ext>
-            </a:extLst>
-          </p:cNvPr>
-          <p:cNvPicPr>
-            <a:picLocks noChangeAspect="1" noChangeArrowheads="1"/>
-          </p:cNvPicPr>
-          <p:nvPr/>
-        </p:nvPicPr>
-        <p:blipFill>
-          <a:blip r:embed="rId2">
-            <a:extLst>
-              <a:ext uri="{28A0092B-C50C-407E-A947-70E740481C1C}">
-                <a14:useLocalDpi xmlns:a14="http://schemas.microsoft.com/office/drawing/2010/main" val="0"/>
-              </a:ext>
-            </a:extLst>
-          </a:blip>
-          <a:srcRect/>
-          <a:stretch>
-            <a:fillRect/>
-          </a:stretch>
-        </p:blipFill>
-        <p:spPr bwMode="auto">
-          <a:xfrm>
-            <a:off x="39814" y="2015732"/>
-            <a:ext cx="6213402" cy="3976577"/>
-          </a:xfrm>
-          <a:prstGeom prst="rect">
-            <a:avLst/>
-          </a:prstGeom>
-          <a:noFill/>
-          <a:extLst>
-            <a:ext uri="{909E8E84-426E-40DD-AFC4-6F175D3DCCD1}">
-              <a14:hiddenFill xmlns:a14="http://schemas.microsoft.com/office/drawing/2010/main">
-                <a:solidFill>
-                  <a:srgbClr val="FFFFFF"/>
-                </a:solidFill>
-              </a14:hiddenFill>
-            </a:ext>
-          </a:extLst>
-        </p:spPr>
-      </p:pic>
-    </p:spTree>
-    <p:extLst>
-      <p:ext uri="{BB962C8B-B14F-4D97-AF65-F5344CB8AC3E}">
-        <p14:creationId xmlns:p14="http://schemas.microsoft.com/office/powerpoint/2010/main" val="2369160108"/>
-      </p:ext>
-    </p:extLst>
-  </p:cSld>
-  <p:clrMapOvr>
-    <a:masterClrMapping/>
-  </p:clrMapOvr>
-</p:sld>
-</file>
-
-<file path=ppt/slides/slide5.xml><?xml version="1.0" encoding="utf-8"?>
-<p:sld xmlns:a="http://schemas.openxmlformats.org/drawingml/2006/main" xmlns:r="http://schemas.openxmlformats.org/officeDocument/2006/relationships" xmlns:p="http://schemas.openxmlformats.org/presentationml/2006/main">
-  <p:cSld>
-    <p:spTree>
-      <p:nvGrpSpPr>
-        <p:cNvPr id="1" name=""/>
-        <p:cNvGrpSpPr/>
-        <p:nvPr/>
-      </p:nvGrpSpPr>
-      <p:grpSpPr>
-        <a:xfrm>
-          <a:off x="0" y="0"/>
-          <a:ext cx="0" cy="0"/>
-          <a:chOff x="0" y="0"/>
-          <a:chExt cx="0" cy="0"/>
-        </a:xfrm>
-      </p:grpSpPr>
-      <p:sp>
-        <p:nvSpPr>
-          <p:cNvPr id="2" name="Title 1">
-            <a:extLst>
-              <a:ext uri="{FF2B5EF4-FFF2-40B4-BE49-F238E27FC236}">
-                <a16:creationId xmlns:a16="http://schemas.microsoft.com/office/drawing/2014/main" id="{4663A77C-3F7E-83A9-547A-556999C0C060}"/>
-              </a:ext>
-            </a:extLst>
-          </p:cNvPr>
-          <p:cNvSpPr>
-            <a:spLocks noGrp="1"/>
-          </p:cNvSpPr>
-          <p:nvPr>
-            <p:ph type="title"/>
-          </p:nvPr>
-        </p:nvSpPr>
-        <p:spPr/>
-        <p:txBody>
-          <a:bodyPr/>
-          <a:lstStyle/>
-          <a:p>
-            <a:r>
-              <a:rPr lang="en-US" dirty="0"/>
-              <a:t>Leading vs Lagging</a:t>
-            </a:r>
-          </a:p>
-        </p:txBody>
-      </p:sp>
-      <p:sp>
-        <p:nvSpPr>
-          <p:cNvPr id="3" name="Content Placeholder 2">
-            <a:extLst>
-              <a:ext uri="{FF2B5EF4-FFF2-40B4-BE49-F238E27FC236}">
-                <a16:creationId xmlns:a16="http://schemas.microsoft.com/office/drawing/2014/main" id="{79922DAA-2DAB-E79B-771A-C3A875A21719}"/>
-              </a:ext>
-            </a:extLst>
-          </p:cNvPr>
-          <p:cNvSpPr>
-            <a:spLocks noGrp="1"/>
-          </p:cNvSpPr>
-          <p:nvPr>
-            <p:ph idx="1"/>
-          </p:nvPr>
-        </p:nvSpPr>
-        <p:spPr>
-          <a:xfrm>
-            <a:off x="6991865" y="2015732"/>
-            <a:ext cx="5066270" cy="3875771"/>
-          </a:xfrm>
-        </p:spPr>
-        <p:txBody>
-          <a:bodyPr/>
-          <a:lstStyle/>
-          <a:p>
-            <a:r>
-              <a:rPr lang="en-US" dirty="0"/>
-              <a:t>KPIs can be leading or lagging. </a:t>
-            </a:r>
-          </a:p>
-          <a:p>
-            <a:r>
-              <a:rPr lang="en-US" dirty="0"/>
-              <a:t>Leading:</a:t>
-            </a:r>
-          </a:p>
-          <a:p>
-            <a:pPr lvl="1"/>
-            <a:r>
-              <a:rPr lang="en-US" dirty="0"/>
-              <a:t>An indicator that something will happen. </a:t>
-            </a:r>
-          </a:p>
-          <a:p>
-            <a:pPr lvl="1"/>
-            <a:r>
-              <a:rPr lang="en-US" dirty="0"/>
-              <a:t>Store traffic indicates future sales. </a:t>
-            </a:r>
-          </a:p>
-          <a:p>
-            <a:r>
-              <a:rPr lang="en-US" dirty="0"/>
-              <a:t>Lagging:</a:t>
-            </a:r>
-          </a:p>
-          <a:p>
-            <a:pPr lvl="1"/>
-            <a:r>
-              <a:rPr lang="en-US" dirty="0"/>
-              <a:t>An indicator something has happened. </a:t>
-            </a:r>
-          </a:p>
-          <a:p>
-            <a:pPr lvl="1"/>
-            <a:r>
-              <a:rPr lang="en-US" dirty="0"/>
-              <a:t>Conversion rate on web visitors to buyers.</a:t>
-            </a:r>
-          </a:p>
-          <a:p>
-            <a:r>
-              <a:rPr lang="en-US" dirty="0"/>
-              <a:t>Both ultimately guide behavior (ideally). </a:t>
-            </a:r>
-          </a:p>
-        </p:txBody>
-      </p:sp>
-      <p:pic>
-        <p:nvPicPr>
-          <p:cNvPr id="3074" name="Picture 2" descr="HR KPIs: Guide, 20 Examples &amp; Free Template - AIHR">
-            <a:extLst>
-              <a:ext uri="{FF2B5EF4-FFF2-40B4-BE49-F238E27FC236}">
-                <a16:creationId xmlns:a16="http://schemas.microsoft.com/office/drawing/2014/main" id="{C6AC7AC8-F472-7D08-316A-5F0BE2925973}"/>
-              </a:ext>
-            </a:extLst>
-          </p:cNvPr>
-          <p:cNvPicPr>
-            <a:picLocks noChangeAspect="1" noChangeArrowheads="1"/>
-          </p:cNvPicPr>
-          <p:nvPr/>
-        </p:nvPicPr>
-        <p:blipFill rotWithShape="1">
-          <a:blip r:embed="rId2">
-            <a:extLst>
-              <a:ext uri="{28A0092B-C50C-407E-A947-70E740481C1C}">
-                <a14:useLocalDpi xmlns:a14="http://schemas.microsoft.com/office/drawing/2010/main" val="0"/>
-              </a:ext>
-            </a:extLst>
-          </a:blip>
-          <a:srcRect t="29392" b="11731"/>
-          <a:stretch>
-            <a:fillRect/>
-          </a:stretch>
-        </p:blipFill>
-        <p:spPr bwMode="auto">
-          <a:xfrm>
-            <a:off x="133865" y="1853754"/>
-            <a:ext cx="6858000" cy="4037749"/>
-          </a:xfrm>
-          <a:prstGeom prst="rect">
-            <a:avLst/>
-          </a:prstGeom>
-          <a:noFill/>
-          <a:extLst>
-            <a:ext uri="{909E8E84-426E-40DD-AFC4-6F175D3DCCD1}">
-              <a14:hiddenFill xmlns:a14="http://schemas.microsoft.com/office/drawing/2010/main">
-                <a:solidFill>
-                  <a:srgbClr val="FFFFFF"/>
-                </a:solidFill>
-              </a14:hiddenFill>
-            </a:ext>
-          </a:extLst>
-        </p:spPr>
-      </p:pic>
-    </p:spTree>
-    <p:extLst>
-      <p:ext uri="{BB962C8B-B14F-4D97-AF65-F5344CB8AC3E}">
-        <p14:creationId xmlns:p14="http://schemas.microsoft.com/office/powerpoint/2010/main" val="15203137"/>
-      </p:ext>
-    </p:extLst>
-  </p:cSld>
-  <p:clrMapOvr>
-    <a:masterClrMapping/>
-  </p:clrMapOvr>
-</p:sld>
-</file>
-
-<file path=ppt/slides/slide6.xml><?xml version="1.0" encoding="utf-8"?>
-<p:sld xmlns:a="http://schemas.openxmlformats.org/drawingml/2006/main" xmlns:r="http://schemas.openxmlformats.org/officeDocument/2006/relationships" xmlns:p="http://schemas.openxmlformats.org/presentationml/2006/main">
-  <p:cSld>
-    <p:spTree>
-      <p:nvGrpSpPr>
-        <p:cNvPr id="1" name=""/>
-        <p:cNvGrpSpPr/>
-        <p:nvPr/>
-      </p:nvGrpSpPr>
-      <p:grpSpPr>
-        <a:xfrm>
-          <a:off x="0" y="0"/>
-          <a:ext cx="0" cy="0"/>
-          <a:chOff x="0" y="0"/>
-          <a:chExt cx="0" cy="0"/>
-        </a:xfrm>
-      </p:grpSpPr>
-      <p:sp>
-        <p:nvSpPr>
-          <p:cNvPr id="2" name="Title 1">
-            <a:extLst>
-              <a:ext uri="{FF2B5EF4-FFF2-40B4-BE49-F238E27FC236}">
-                <a16:creationId xmlns:a16="http://schemas.microsoft.com/office/drawing/2014/main" id="{52AA0E2D-CF82-5CD6-82F5-9AE8C1DA8F8E}"/>
-              </a:ext>
-            </a:extLst>
-          </p:cNvPr>
-          <p:cNvSpPr>
-            <a:spLocks noGrp="1"/>
-          </p:cNvSpPr>
-          <p:nvPr>
-            <p:ph type="title"/>
-          </p:nvPr>
-        </p:nvSpPr>
-        <p:spPr/>
-        <p:txBody>
-          <a:bodyPr/>
-          <a:lstStyle/>
-          <a:p>
-            <a:r>
-              <a:rPr lang="en-US" dirty="0"/>
-              <a:t>Developing KPIs</a:t>
-            </a:r>
-          </a:p>
-        </p:txBody>
-      </p:sp>
-      <p:sp>
-        <p:nvSpPr>
-          <p:cNvPr id="3" name="Content Placeholder 2">
-            <a:extLst>
-              <a:ext uri="{FF2B5EF4-FFF2-40B4-BE49-F238E27FC236}">
-                <a16:creationId xmlns:a16="http://schemas.microsoft.com/office/drawing/2014/main" id="{67015E79-AA17-0157-3DF3-EEA13229E314}"/>
-              </a:ext>
-            </a:extLst>
-          </p:cNvPr>
-          <p:cNvSpPr>
-            <a:spLocks noGrp="1"/>
-          </p:cNvSpPr>
-          <p:nvPr>
-            <p:ph idx="1"/>
-          </p:nvPr>
-        </p:nvSpPr>
-        <p:spPr>
-          <a:xfrm>
-            <a:off x="1451579" y="1853755"/>
-            <a:ext cx="10020951" cy="4199726"/>
-          </a:xfrm>
-        </p:spPr>
-        <p:txBody>
-          <a:bodyPr/>
-          <a:lstStyle/>
-          <a:p>
-            <a:r>
-              <a:rPr lang="en-US" dirty="0"/>
-              <a:t>KPIs will differ depending on organization and circumstances. </a:t>
-            </a:r>
-          </a:p>
-          <a:p>
-            <a:r>
-              <a:rPr lang="en-US" dirty="0"/>
-              <a:t>The goal is to, as best as possible, summarize the performance of the org in a few values. </a:t>
-            </a:r>
-          </a:p>
-          <a:p>
-            <a:pPr lvl="1"/>
-            <a:r>
-              <a:rPr lang="en-US" dirty="0"/>
-              <a:t>I.e. if these metrics look good, we are doing well. </a:t>
-            </a:r>
-          </a:p>
-          <a:p>
-            <a:r>
-              <a:rPr lang="en-US" dirty="0"/>
-              <a:t>Broad consideration – financials are included, but not the only thing. </a:t>
-            </a:r>
-          </a:p>
-          <a:p>
-            <a:pPr lvl="1"/>
-            <a:r>
-              <a:rPr lang="en-US" dirty="0"/>
-              <a:t>Customer opinion, job applicant quality, social media mentions, supplier limits, </a:t>
-            </a:r>
-            <a:r>
-              <a:rPr lang="en-US" dirty="0" err="1"/>
-              <a:t>etc</a:t>
-            </a:r>
-            <a:r>
-              <a:rPr lang="en-US" dirty="0"/>
-              <a:t>…</a:t>
-            </a:r>
-          </a:p>
-          <a:p>
-            <a:r>
-              <a:rPr lang="en-US" dirty="0"/>
-              <a:t>Stakeholder consultation – ‘success’ for different departments may be different. </a:t>
-            </a:r>
-          </a:p>
-          <a:p>
-            <a:pPr lvl="1"/>
-            <a:r>
-              <a:rPr lang="en-US" dirty="0"/>
-              <a:t>The process of identifying KPIs can help reveal this*. </a:t>
-            </a:r>
-          </a:p>
-          <a:p>
-            <a:r>
-              <a:rPr lang="en-US" dirty="0"/>
-              <a:t>Relevance (again) – easy to measure != important. Important things may be hard to measure. </a:t>
-            </a:r>
-          </a:p>
-        </p:txBody>
-      </p:sp>
-    </p:spTree>
-    <p:extLst>
-      <p:ext uri="{BB962C8B-B14F-4D97-AF65-F5344CB8AC3E}">
-        <p14:creationId xmlns:p14="http://schemas.microsoft.com/office/powerpoint/2010/main" val="619007314"/>
-      </p:ext>
-    </p:extLst>
-  </p:cSld>
-  <p:clrMapOvr>
-    <a:masterClrMapping/>
-  </p:clrMapOvr>
-</p:sld>
-</file>
-
-<file path=ppt/slides/slide7.xml><?xml version="1.0" encoding="utf-8"?>
-<p:sld xmlns:a="http://schemas.openxmlformats.org/drawingml/2006/main" xmlns:r="http://schemas.openxmlformats.org/officeDocument/2006/relationships" xmlns:p="http://schemas.openxmlformats.org/presentationml/2006/main">
-  <p:cSld>
-    <p:spTree>
-      <p:nvGrpSpPr>
-        <p:cNvPr id="1" name=""/>
-        <p:cNvGrpSpPr/>
-        <p:nvPr/>
-      </p:nvGrpSpPr>
-      <p:grpSpPr>
-        <a:xfrm>
-          <a:off x="0" y="0"/>
-          <a:ext cx="0" cy="0"/>
-          <a:chOff x="0" y="0"/>
-          <a:chExt cx="0" cy="0"/>
-        </a:xfrm>
-      </p:grpSpPr>
-      <p:sp>
-        <p:nvSpPr>
-          <p:cNvPr id="2" name="Title 1">
-            <a:extLst>
-              <a:ext uri="{FF2B5EF4-FFF2-40B4-BE49-F238E27FC236}">
-                <a16:creationId xmlns:a16="http://schemas.microsoft.com/office/drawing/2014/main" id="{854A8256-2106-1296-7151-413B7EBE383D}"/>
-              </a:ext>
-            </a:extLst>
-          </p:cNvPr>
-          <p:cNvSpPr>
-            <a:spLocks noGrp="1"/>
-          </p:cNvSpPr>
-          <p:nvPr>
-            <p:ph type="title"/>
-          </p:nvPr>
-        </p:nvSpPr>
-        <p:spPr/>
-        <p:txBody>
-          <a:bodyPr/>
-          <a:lstStyle/>
-          <a:p>
-            <a:r>
-              <a:rPr lang="en-US" dirty="0"/>
-              <a:t>This process isn’t always that easy</a:t>
-            </a:r>
-          </a:p>
-        </p:txBody>
-      </p:sp>
-      <p:sp>
-        <p:nvSpPr>
-          <p:cNvPr id="3" name="Content Placeholder 2">
-            <a:extLst>
-              <a:ext uri="{FF2B5EF4-FFF2-40B4-BE49-F238E27FC236}">
-                <a16:creationId xmlns:a16="http://schemas.microsoft.com/office/drawing/2014/main" id="{9612B44B-7EA0-E265-76D7-125211805F35}"/>
-              </a:ext>
-            </a:extLst>
-          </p:cNvPr>
-          <p:cNvSpPr>
-            <a:spLocks noGrp="1"/>
-          </p:cNvSpPr>
-          <p:nvPr>
-            <p:ph idx="1"/>
-          </p:nvPr>
-        </p:nvSpPr>
-        <p:spPr>
-          <a:xfrm>
-            <a:off x="1451579" y="1853753"/>
-            <a:ext cx="9603275" cy="4199727"/>
-          </a:xfrm>
-        </p:spPr>
-        <p:txBody>
-          <a:bodyPr/>
-          <a:lstStyle/>
-          <a:p>
-            <a:r>
-              <a:rPr lang="en-US" dirty="0"/>
-              <a:t>Beyond profit/sales, many companies have no clue what matters. </a:t>
-            </a:r>
-          </a:p>
-          <a:p>
-            <a:pPr lvl="1"/>
-            <a:r>
-              <a:rPr lang="en-US" dirty="0"/>
-              <a:t>Especially large corporations where departments are far separated from sales. </a:t>
-            </a:r>
-          </a:p>
-          <a:p>
-            <a:pPr lvl="1"/>
-            <a:r>
-              <a:rPr lang="en-US" dirty="0"/>
-              <a:t>Many departments have metrics that were picked arbitrarily. </a:t>
-            </a:r>
-          </a:p>
-          <a:p>
-            <a:r>
-              <a:rPr lang="en-US" dirty="0"/>
-              <a:t>Working on reporting on metrics often results in you determining what they are. </a:t>
-            </a:r>
-          </a:p>
-          <a:p>
-            <a:pPr lvl="1"/>
-            <a:r>
-              <a:rPr lang="en-US" dirty="0"/>
-              <a:t>Managers are attached to what they already achieve. </a:t>
-            </a:r>
-          </a:p>
-          <a:p>
-            <a:pPr lvl="1"/>
-            <a:r>
-              <a:rPr lang="en-US" dirty="0"/>
-              <a:t>Example – I revised compliance training (e.g. anti money laundering) assignment and reporting for ATB. The compliance people didn’t know what they needed to report, just reported the numbers that they had. </a:t>
-            </a:r>
-          </a:p>
-          <a:p>
-            <a:r>
-              <a:rPr lang="en-US" dirty="0"/>
-              <a:t>We can use some other analytics tools to help a little….</a:t>
-            </a:r>
-          </a:p>
-          <a:p>
-            <a:pPr lvl="1"/>
-            <a:r>
-              <a:rPr lang="en-US" dirty="0"/>
-              <a:t>This usually requires domain knowledge and usually many meetings. </a:t>
-            </a:r>
-          </a:p>
-        </p:txBody>
-      </p:sp>
-    </p:spTree>
-    <p:extLst>
-      <p:ext uri="{BB962C8B-B14F-4D97-AF65-F5344CB8AC3E}">
-        <p14:creationId xmlns:p14="http://schemas.microsoft.com/office/powerpoint/2010/main" val="1189005953"/>
-      </p:ext>
-    </p:extLst>
-  </p:cSld>
-  <p:clrMapOvr>
-    <a:masterClrMapping/>
-  </p:clrMapOvr>
-</p:sld>
-</file>
-
-<file path=ppt/slides/slide8.xml><?xml version="1.0" encoding="utf-8"?>
-<p:sld xmlns:a="http://schemas.openxmlformats.org/drawingml/2006/main" xmlns:r="http://schemas.openxmlformats.org/officeDocument/2006/relationships" xmlns:p="http://schemas.openxmlformats.org/presentationml/2006/main">
-  <p:cSld>
-    <p:spTree>
-      <p:nvGrpSpPr>
-        <p:cNvPr id="1" name=""/>
-        <p:cNvGrpSpPr/>
-        <p:nvPr/>
-      </p:nvGrpSpPr>
-      <p:grpSpPr>
-        <a:xfrm>
-          <a:off x="0" y="0"/>
-          <a:ext cx="0" cy="0"/>
-          <a:chOff x="0" y="0"/>
-          <a:chExt cx="0" cy="0"/>
-        </a:xfrm>
-      </p:grpSpPr>
-      <p:sp>
-        <p:nvSpPr>
-          <p:cNvPr id="2" name="Title 1">
-            <a:extLst>
-              <a:ext uri="{FF2B5EF4-FFF2-40B4-BE49-F238E27FC236}">
                 <a16:creationId xmlns:a16="http://schemas.microsoft.com/office/drawing/2014/main" id="{B016B3CA-81E2-BEE4-11CC-16FCA286557E}"/>
               </a:ext>
             </a:extLst>
@@ -5566,7 +4186,7 @@
           <a:p>
             <a:r>
               <a:rPr lang="en-US" dirty="0"/>
-              <a:t>Recall regression models:</a:t>
+              <a:t>Regression models (we’ll do more soon on this):</a:t>
             </a:r>
           </a:p>
           <a:p>
@@ -5701,7 +4321,7 @@
 </p:sld>
 </file>
 
-<file path=ppt/slides/slide9.xml><?xml version="1.0" encoding="utf-8"?>
+<file path=ppt/slides/slide13.xml><?xml version="1.0" encoding="utf-8"?>
 <p:sld xmlns:a="http://schemas.openxmlformats.org/drawingml/2006/main" xmlns:r="http://schemas.openxmlformats.org/officeDocument/2006/relationships" xmlns:p="http://schemas.openxmlformats.org/presentationml/2006/main">
   <p:cSld>
     <p:spTree>
@@ -5837,6 +4457,1898 @@
     <p:extLst>
       <p:ext uri="{BB962C8B-B14F-4D97-AF65-F5344CB8AC3E}">
         <p14:creationId xmlns:p14="http://schemas.microsoft.com/office/powerpoint/2010/main" val="1183994503"/>
+      </p:ext>
+    </p:extLst>
+  </p:cSld>
+  <p:clrMapOvr>
+    <a:masterClrMapping/>
+  </p:clrMapOvr>
+</p:sld>
+</file>
+
+<file path=ppt/slides/slide14.xml><?xml version="1.0" encoding="utf-8"?>
+<p:sld xmlns:a="http://schemas.openxmlformats.org/drawingml/2006/main" xmlns:r="http://schemas.openxmlformats.org/officeDocument/2006/relationships" xmlns:p="http://schemas.openxmlformats.org/presentationml/2006/main">
+  <p:cSld>
+    <p:spTree>
+      <p:nvGrpSpPr>
+        <p:cNvPr id="1" name=""/>
+        <p:cNvGrpSpPr/>
+        <p:nvPr/>
+      </p:nvGrpSpPr>
+      <p:grpSpPr>
+        <a:xfrm>
+          <a:off x="0" y="0"/>
+          <a:ext cx="0" cy="0"/>
+          <a:chOff x="0" y="0"/>
+          <a:chExt cx="0" cy="0"/>
+        </a:xfrm>
+      </p:grpSpPr>
+      <p:sp>
+        <p:nvSpPr>
+          <p:cNvPr id="2" name="Title 1">
+            <a:extLst>
+              <a:ext uri="{FF2B5EF4-FFF2-40B4-BE49-F238E27FC236}">
+                <a16:creationId xmlns:a16="http://schemas.microsoft.com/office/drawing/2014/main" id="{7ACE6463-77A1-2206-0134-C25E28646EDC}"/>
+              </a:ext>
+            </a:extLst>
+          </p:cNvPr>
+          <p:cNvSpPr>
+            <a:spLocks noGrp="1"/>
+          </p:cNvSpPr>
+          <p:nvPr>
+            <p:ph type="title"/>
+          </p:nvPr>
+        </p:nvSpPr>
+        <p:spPr/>
+        <p:txBody>
+          <a:bodyPr/>
+          <a:lstStyle/>
+          <a:p>
+            <a:r>
+              <a:rPr lang="en-US" dirty="0"/>
+              <a:t>Detecting the Cause</a:t>
+            </a:r>
+          </a:p>
+        </p:txBody>
+      </p:sp>
+      <p:sp>
+        <p:nvSpPr>
+          <p:cNvPr id="3" name="Content Placeholder 2">
+            <a:extLst>
+              <a:ext uri="{FF2B5EF4-FFF2-40B4-BE49-F238E27FC236}">
+                <a16:creationId xmlns:a16="http://schemas.microsoft.com/office/drawing/2014/main" id="{474714D6-54A6-4099-A7F2-870A8A8C1DA3}"/>
+              </a:ext>
+            </a:extLst>
+          </p:cNvPr>
+          <p:cNvSpPr>
+            <a:spLocks noGrp="1"/>
+          </p:cNvSpPr>
+          <p:nvPr>
+            <p:ph idx="1"/>
+          </p:nvPr>
+        </p:nvSpPr>
+        <p:spPr/>
+        <p:txBody>
+          <a:bodyPr/>
+          <a:lstStyle/>
+          <a:p>
+            <a:endParaRPr lang="en-US" dirty="0"/>
+          </a:p>
+        </p:txBody>
+      </p:sp>
+      <p:pic>
+        <p:nvPicPr>
+          <p:cNvPr id="4" name="Picture 4" descr="Correlation is not causation">
+            <a:extLst>
+              <a:ext uri="{FF2B5EF4-FFF2-40B4-BE49-F238E27FC236}">
+                <a16:creationId xmlns:a16="http://schemas.microsoft.com/office/drawing/2014/main" id="{1D6231EA-FFB7-241D-BEF4-351D6BDDFB15}"/>
+              </a:ext>
+            </a:extLst>
+          </p:cNvPr>
+          <p:cNvPicPr>
+            <a:picLocks noChangeAspect="1" noChangeArrowheads="1"/>
+          </p:cNvPicPr>
+          <p:nvPr/>
+        </p:nvPicPr>
+        <p:blipFill>
+          <a:blip r:embed="rId2">
+            <a:extLst>
+              <a:ext uri="{28A0092B-C50C-407E-A947-70E740481C1C}">
+                <a14:useLocalDpi xmlns:a14="http://schemas.microsoft.com/office/drawing/2010/main" val="0"/>
+              </a:ext>
+            </a:extLst>
+          </a:blip>
+          <a:srcRect/>
+          <a:stretch>
+            <a:fillRect/>
+          </a:stretch>
+        </p:blipFill>
+        <p:spPr bwMode="auto">
+          <a:xfrm>
+            <a:off x="1451579" y="1569548"/>
+            <a:ext cx="9603275" cy="5015654"/>
+          </a:xfrm>
+          <a:prstGeom prst="rect">
+            <a:avLst/>
+          </a:prstGeom>
+          <a:noFill/>
+          <a:extLst>
+            <a:ext uri="{909E8E84-426E-40DD-AFC4-6F175D3DCCD1}">
+              <a14:hiddenFill xmlns:a14="http://schemas.microsoft.com/office/drawing/2010/main">
+                <a:solidFill>
+                  <a:srgbClr val="FFFFFF"/>
+                </a:solidFill>
+              </a14:hiddenFill>
+            </a:ext>
+          </a:extLst>
+        </p:spPr>
+      </p:pic>
+    </p:spTree>
+    <p:extLst>
+      <p:ext uri="{BB962C8B-B14F-4D97-AF65-F5344CB8AC3E}">
+        <p14:creationId xmlns:p14="http://schemas.microsoft.com/office/powerpoint/2010/main" val="16576913"/>
+      </p:ext>
+    </p:extLst>
+  </p:cSld>
+  <p:clrMapOvr>
+    <a:masterClrMapping/>
+  </p:clrMapOvr>
+</p:sld>
+</file>
+
+<file path=ppt/slides/slide15.xml><?xml version="1.0" encoding="utf-8"?>
+<p:sld xmlns:a="http://schemas.openxmlformats.org/drawingml/2006/main" xmlns:r="http://schemas.openxmlformats.org/officeDocument/2006/relationships" xmlns:p="http://schemas.openxmlformats.org/presentationml/2006/main">
+  <p:cSld>
+    <p:spTree>
+      <p:nvGrpSpPr>
+        <p:cNvPr id="1" name=""/>
+        <p:cNvGrpSpPr/>
+        <p:nvPr/>
+      </p:nvGrpSpPr>
+      <p:grpSpPr>
+        <a:xfrm>
+          <a:off x="0" y="0"/>
+          <a:ext cx="0" cy="0"/>
+          <a:chOff x="0" y="0"/>
+          <a:chExt cx="0" cy="0"/>
+        </a:xfrm>
+      </p:grpSpPr>
+      <p:sp>
+        <p:nvSpPr>
+          <p:cNvPr id="2" name="Title 1">
+            <a:extLst>
+              <a:ext uri="{FF2B5EF4-FFF2-40B4-BE49-F238E27FC236}">
+                <a16:creationId xmlns:a16="http://schemas.microsoft.com/office/drawing/2014/main" id="{1F762F30-E570-0596-0586-5A4DA795F0F7}"/>
+              </a:ext>
+            </a:extLst>
+          </p:cNvPr>
+          <p:cNvSpPr>
+            <a:spLocks noGrp="1"/>
+          </p:cNvSpPr>
+          <p:nvPr>
+            <p:ph type="title"/>
+          </p:nvPr>
+        </p:nvSpPr>
+        <p:spPr/>
+        <p:txBody>
+          <a:bodyPr/>
+          <a:lstStyle/>
+          <a:p>
+            <a:r>
+              <a:rPr lang="en-US" dirty="0"/>
+              <a:t>Causation Analysis</a:t>
+            </a:r>
+          </a:p>
+        </p:txBody>
+      </p:sp>
+      <p:sp>
+        <p:nvSpPr>
+          <p:cNvPr id="3" name="Content Placeholder 2">
+            <a:extLst>
+              <a:ext uri="{FF2B5EF4-FFF2-40B4-BE49-F238E27FC236}">
+                <a16:creationId xmlns:a16="http://schemas.microsoft.com/office/drawing/2014/main" id="{DD0D6535-25C7-76D2-D56D-512FABEAEA4A}"/>
+              </a:ext>
+            </a:extLst>
+          </p:cNvPr>
+          <p:cNvSpPr>
+            <a:spLocks noGrp="1"/>
+          </p:cNvSpPr>
+          <p:nvPr>
+            <p:ph idx="1"/>
+          </p:nvPr>
+        </p:nvSpPr>
+        <p:spPr>
+          <a:xfrm>
+            <a:off x="4046141" y="2015732"/>
+            <a:ext cx="7784352" cy="4037749"/>
+          </a:xfrm>
+        </p:spPr>
+        <p:txBody>
+          <a:bodyPr/>
+          <a:lstStyle/>
+          <a:p>
+            <a:r>
+              <a:rPr lang="en-US" dirty="0"/>
+              <a:t>Diagnostic analytics is the branch that we often skim over. </a:t>
+            </a:r>
+          </a:p>
+          <a:p>
+            <a:pPr lvl="1"/>
+            <a:r>
+              <a:rPr lang="en-US" dirty="0"/>
+              <a:t>We observe something happening and want to know why. </a:t>
+            </a:r>
+          </a:p>
+          <a:p>
+            <a:r>
+              <a:rPr lang="en-US" dirty="0"/>
+              <a:t>Two things happening together doesn’t mean one caused the other. </a:t>
+            </a:r>
+          </a:p>
+          <a:p>
+            <a:pPr lvl="1"/>
+            <a:r>
+              <a:rPr lang="en-US" dirty="0"/>
+              <a:t>Correlation is very easy to measure, but may not matter. </a:t>
+            </a:r>
+          </a:p>
+          <a:p>
+            <a:pPr lvl="1"/>
+            <a:r>
+              <a:rPr lang="en-US" dirty="0"/>
+              <a:t>Coincidences, other impacts, of shared causes may occur. </a:t>
+            </a:r>
+          </a:p>
+          <a:p>
+            <a:r>
+              <a:rPr lang="en-US" dirty="0"/>
+              <a:t>Causation analysis is a branch of analytics that tries to prove causation.</a:t>
+            </a:r>
+          </a:p>
+          <a:p>
+            <a:pPr lvl="1"/>
+            <a:r>
+              <a:rPr lang="en-US" dirty="0"/>
+              <a:t>If we can spot causes, we can embrace or avoid in advance. 	</a:t>
+            </a:r>
+          </a:p>
+          <a:p>
+            <a:pPr lvl="1"/>
+            <a:r>
+              <a:rPr lang="en-US" dirty="0"/>
+              <a:t>Focusing on markers that happen earlier is an advantage. </a:t>
+            </a:r>
+          </a:p>
+          <a:p>
+            <a:r>
+              <a:rPr lang="en-US" dirty="0"/>
+              <a:t>Causal analysis is hard, there are a few simple-</a:t>
+            </a:r>
+            <a:r>
+              <a:rPr lang="en-US" dirty="0" err="1"/>
+              <a:t>ish</a:t>
+            </a:r>
+            <a:r>
+              <a:rPr lang="en-US" dirty="0"/>
+              <a:t> examples…</a:t>
+            </a:r>
+          </a:p>
+        </p:txBody>
+      </p:sp>
+      <p:pic>
+        <p:nvPicPr>
+          <p:cNvPr id="5122" name="Picture 2" descr="Correlation vs Causation">
+            <a:extLst>
+              <a:ext uri="{FF2B5EF4-FFF2-40B4-BE49-F238E27FC236}">
+                <a16:creationId xmlns:a16="http://schemas.microsoft.com/office/drawing/2014/main" id="{B8DED405-214C-026E-090E-C76458BE7110}"/>
+              </a:ext>
+            </a:extLst>
+          </p:cNvPr>
+          <p:cNvPicPr>
+            <a:picLocks noChangeAspect="1" noChangeArrowheads="1"/>
+          </p:cNvPicPr>
+          <p:nvPr/>
+        </p:nvPicPr>
+        <p:blipFill rotWithShape="1">
+          <a:blip r:embed="rId2">
+            <a:extLst>
+              <a:ext uri="{28A0092B-C50C-407E-A947-70E740481C1C}">
+                <a14:useLocalDpi xmlns:a14="http://schemas.microsoft.com/office/drawing/2010/main" val="0"/>
+              </a:ext>
+            </a:extLst>
+          </a:blip>
+          <a:srcRect b="9458"/>
+          <a:stretch>
+            <a:fillRect/>
+          </a:stretch>
+        </p:blipFill>
+        <p:spPr bwMode="auto">
+          <a:xfrm>
+            <a:off x="361507" y="1502880"/>
+            <a:ext cx="3684633" cy="5004246"/>
+          </a:xfrm>
+          <a:prstGeom prst="rect">
+            <a:avLst/>
+          </a:prstGeom>
+          <a:noFill/>
+          <a:extLst>
+            <a:ext uri="{909E8E84-426E-40DD-AFC4-6F175D3DCCD1}">
+              <a14:hiddenFill xmlns:a14="http://schemas.microsoft.com/office/drawing/2010/main">
+                <a:solidFill>
+                  <a:srgbClr val="FFFFFF"/>
+                </a:solidFill>
+              </a14:hiddenFill>
+            </a:ext>
+          </a:extLst>
+        </p:spPr>
+      </p:pic>
+    </p:spTree>
+    <p:extLst>
+      <p:ext uri="{BB962C8B-B14F-4D97-AF65-F5344CB8AC3E}">
+        <p14:creationId xmlns:p14="http://schemas.microsoft.com/office/powerpoint/2010/main" val="1655612915"/>
+      </p:ext>
+    </p:extLst>
+  </p:cSld>
+  <p:clrMapOvr>
+    <a:masterClrMapping/>
+  </p:clrMapOvr>
+</p:sld>
+</file>
+
+<file path=ppt/slides/slide16.xml><?xml version="1.0" encoding="utf-8"?>
+<p:sld xmlns:a="http://schemas.openxmlformats.org/drawingml/2006/main" xmlns:r="http://schemas.openxmlformats.org/officeDocument/2006/relationships" xmlns:p="http://schemas.openxmlformats.org/presentationml/2006/main">
+  <p:cSld>
+    <p:spTree>
+      <p:nvGrpSpPr>
+        <p:cNvPr id="1" name=""/>
+        <p:cNvGrpSpPr/>
+        <p:nvPr/>
+      </p:nvGrpSpPr>
+      <p:grpSpPr>
+        <a:xfrm>
+          <a:off x="0" y="0"/>
+          <a:ext cx="0" cy="0"/>
+          <a:chOff x="0" y="0"/>
+          <a:chExt cx="0" cy="0"/>
+        </a:xfrm>
+      </p:grpSpPr>
+      <p:sp>
+        <p:nvSpPr>
+          <p:cNvPr id="2" name="Title 1">
+            <a:extLst>
+              <a:ext uri="{FF2B5EF4-FFF2-40B4-BE49-F238E27FC236}">
+                <a16:creationId xmlns:a16="http://schemas.microsoft.com/office/drawing/2014/main" id="{D98C3621-E7B9-339E-DEF2-17FEFA04F1F1}"/>
+              </a:ext>
+            </a:extLst>
+          </p:cNvPr>
+          <p:cNvSpPr>
+            <a:spLocks noGrp="1"/>
+          </p:cNvSpPr>
+          <p:nvPr>
+            <p:ph type="title"/>
+          </p:nvPr>
+        </p:nvSpPr>
+        <p:spPr/>
+        <p:txBody>
+          <a:bodyPr/>
+          <a:lstStyle/>
+          <a:p>
+            <a:r>
+              <a:rPr lang="en-US" dirty="0"/>
+              <a:t>Causal Inference – did this Cause that? </a:t>
+            </a:r>
+          </a:p>
+        </p:txBody>
+      </p:sp>
+      <p:sp>
+        <p:nvSpPr>
+          <p:cNvPr id="3" name="Content Placeholder 2">
+            <a:extLst>
+              <a:ext uri="{FF2B5EF4-FFF2-40B4-BE49-F238E27FC236}">
+                <a16:creationId xmlns:a16="http://schemas.microsoft.com/office/drawing/2014/main" id="{D4DCBDB5-C987-EA80-F978-AF2515EEE413}"/>
+              </a:ext>
+            </a:extLst>
+          </p:cNvPr>
+          <p:cNvSpPr>
+            <a:spLocks noGrp="1"/>
+          </p:cNvSpPr>
+          <p:nvPr>
+            <p:ph idx="1"/>
+          </p:nvPr>
+        </p:nvSpPr>
+        <p:spPr>
+          <a:xfrm>
+            <a:off x="963826" y="2015732"/>
+            <a:ext cx="6960193" cy="4037749"/>
+          </a:xfrm>
+        </p:spPr>
+        <p:txBody>
+          <a:bodyPr/>
+          <a:lstStyle/>
+          <a:p>
+            <a:r>
+              <a:rPr lang="en-US" dirty="0"/>
+              <a:t>Sequencing – if Thing A always occurs directly before Thing B. </a:t>
+            </a:r>
+          </a:p>
+          <a:p>
+            <a:pPr lvl="1"/>
+            <a:r>
+              <a:rPr lang="en-US" dirty="0"/>
+              <a:t>With time-based data we can track this on a massive scale easily. </a:t>
+            </a:r>
+          </a:p>
+          <a:p>
+            <a:pPr lvl="1"/>
+            <a:r>
+              <a:rPr lang="en-US" dirty="0"/>
+              <a:t>E.g. Amazon can track if suggesting products yields sales over billions of examples. </a:t>
+            </a:r>
+          </a:p>
+          <a:p>
+            <a:r>
+              <a:rPr lang="en-US" dirty="0"/>
+              <a:t>A/B testing – change one variable, observe results. </a:t>
+            </a:r>
+          </a:p>
+          <a:p>
+            <a:pPr lvl="1"/>
+            <a:r>
+              <a:rPr lang="en-US" dirty="0"/>
+              <a:t>This is something that is made much easier with online business. </a:t>
+            </a:r>
+          </a:p>
+          <a:p>
+            <a:pPr lvl="1"/>
+            <a:r>
+              <a:rPr lang="en-US" dirty="0"/>
+              <a:t>Change one variable, like which ad is shown, and measure results, like click rate. </a:t>
+            </a:r>
+          </a:p>
+          <a:p>
+            <a:pPr lvl="1"/>
+            <a:r>
+              <a:rPr lang="en-US" dirty="0"/>
+              <a:t>If everything else is controlled, can draw inference from the change. </a:t>
+            </a:r>
+          </a:p>
+        </p:txBody>
+      </p:sp>
+      <p:pic>
+        <p:nvPicPr>
+          <p:cNvPr id="6146" name="Picture 2">
+            <a:extLst>
+              <a:ext uri="{FF2B5EF4-FFF2-40B4-BE49-F238E27FC236}">
+                <a16:creationId xmlns:a16="http://schemas.microsoft.com/office/drawing/2014/main" id="{2F1BE797-3DFE-15C4-5BFD-7E617344E214}"/>
+              </a:ext>
+            </a:extLst>
+          </p:cNvPr>
+          <p:cNvPicPr>
+            <a:picLocks noChangeAspect="1" noChangeArrowheads="1"/>
+          </p:cNvPicPr>
+          <p:nvPr/>
+        </p:nvPicPr>
+        <p:blipFill>
+          <a:blip r:embed="rId2">
+            <a:extLst>
+              <a:ext uri="{28A0092B-C50C-407E-A947-70E740481C1C}">
+                <a14:useLocalDpi xmlns:a14="http://schemas.microsoft.com/office/drawing/2010/main" val="0"/>
+              </a:ext>
+            </a:extLst>
+          </a:blip>
+          <a:srcRect/>
+          <a:stretch>
+            <a:fillRect/>
+          </a:stretch>
+        </p:blipFill>
+        <p:spPr bwMode="auto">
+          <a:xfrm>
+            <a:off x="7924019" y="2204308"/>
+            <a:ext cx="4161575" cy="2449384"/>
+          </a:xfrm>
+          <a:prstGeom prst="rect">
+            <a:avLst/>
+          </a:prstGeom>
+          <a:noFill/>
+          <a:extLst>
+            <a:ext uri="{909E8E84-426E-40DD-AFC4-6F175D3DCCD1}">
+              <a14:hiddenFill xmlns:a14="http://schemas.microsoft.com/office/drawing/2010/main">
+                <a:solidFill>
+                  <a:srgbClr val="FFFFFF"/>
+                </a:solidFill>
+              </a14:hiddenFill>
+            </a:ext>
+          </a:extLst>
+        </p:spPr>
+      </p:pic>
+    </p:spTree>
+    <p:extLst>
+      <p:ext uri="{BB962C8B-B14F-4D97-AF65-F5344CB8AC3E}">
+        <p14:creationId xmlns:p14="http://schemas.microsoft.com/office/powerpoint/2010/main" val="4008826286"/>
+      </p:ext>
+    </p:extLst>
+  </p:cSld>
+  <p:clrMapOvr>
+    <a:masterClrMapping/>
+  </p:clrMapOvr>
+</p:sld>
+</file>
+
+<file path=ppt/slides/slide17.xml><?xml version="1.0" encoding="utf-8"?>
+<p:sld xmlns:a="http://schemas.openxmlformats.org/drawingml/2006/main" xmlns:r="http://schemas.openxmlformats.org/officeDocument/2006/relationships" xmlns:p="http://schemas.openxmlformats.org/presentationml/2006/main">
+  <p:cSld>
+    <p:spTree>
+      <p:nvGrpSpPr>
+        <p:cNvPr id="1" name=""/>
+        <p:cNvGrpSpPr/>
+        <p:nvPr/>
+      </p:nvGrpSpPr>
+      <p:grpSpPr>
+        <a:xfrm>
+          <a:off x="0" y="0"/>
+          <a:ext cx="0" cy="0"/>
+          <a:chOff x="0" y="0"/>
+          <a:chExt cx="0" cy="0"/>
+        </a:xfrm>
+      </p:grpSpPr>
+      <p:sp>
+        <p:nvSpPr>
+          <p:cNvPr id="2" name="Title 1">
+            <a:extLst>
+              <a:ext uri="{FF2B5EF4-FFF2-40B4-BE49-F238E27FC236}">
+                <a16:creationId xmlns:a16="http://schemas.microsoft.com/office/drawing/2014/main" id="{52D939F7-6442-0224-9066-BF36E96B488F}"/>
+              </a:ext>
+            </a:extLst>
+          </p:cNvPr>
+          <p:cNvSpPr>
+            <a:spLocks noGrp="1"/>
+          </p:cNvSpPr>
+          <p:nvPr>
+            <p:ph type="title"/>
+          </p:nvPr>
+        </p:nvSpPr>
+        <p:spPr/>
+        <p:txBody>
+          <a:bodyPr/>
+          <a:lstStyle/>
+          <a:p>
+            <a:r>
+              <a:rPr lang="en-US" dirty="0"/>
+              <a:t>KPIs and </a:t>
+            </a:r>
+            <a:r>
+              <a:rPr lang="en-US" dirty="0" err="1"/>
+              <a:t>Dashbaords</a:t>
+            </a:r>
+            <a:endParaRPr lang="en-US" dirty="0"/>
+          </a:p>
+        </p:txBody>
+      </p:sp>
+      <p:sp>
+        <p:nvSpPr>
+          <p:cNvPr id="3" name="Content Placeholder 2">
+            <a:extLst>
+              <a:ext uri="{FF2B5EF4-FFF2-40B4-BE49-F238E27FC236}">
+                <a16:creationId xmlns:a16="http://schemas.microsoft.com/office/drawing/2014/main" id="{521B05AE-0129-A6DF-FEE2-A88E14802357}"/>
+              </a:ext>
+            </a:extLst>
+          </p:cNvPr>
+          <p:cNvSpPr>
+            <a:spLocks noGrp="1"/>
+          </p:cNvSpPr>
+          <p:nvPr>
+            <p:ph idx="1"/>
+          </p:nvPr>
+        </p:nvSpPr>
+        <p:spPr>
+          <a:xfrm>
+            <a:off x="6804454" y="2015732"/>
+            <a:ext cx="5288692" cy="3450613"/>
+          </a:xfrm>
+        </p:spPr>
+        <p:txBody>
+          <a:bodyPr/>
+          <a:lstStyle/>
+          <a:p>
+            <a:r>
+              <a:rPr lang="en-US" dirty="0"/>
+              <a:t>Modern dashboards are an easy way to show KPIs to users. </a:t>
+            </a:r>
+          </a:p>
+          <a:p>
+            <a:r>
+              <a:rPr lang="en-US" dirty="0"/>
+              <a:t>Can make one dashboard and allow tailoring. </a:t>
+            </a:r>
+          </a:p>
+          <a:p>
+            <a:pPr lvl="1"/>
+            <a:r>
+              <a:rPr lang="en-US" dirty="0"/>
+              <a:t>Parameters, filters, interactivity….</a:t>
+            </a:r>
+          </a:p>
+          <a:p>
+            <a:r>
+              <a:rPr lang="en-US" dirty="0"/>
+              <a:t>E.g. at ATB we used to make ~15 different reports on the same thing for different areas. Change to 2 base reports with options. </a:t>
+            </a:r>
+          </a:p>
+        </p:txBody>
+      </p:sp>
+      <p:pic>
+        <p:nvPicPr>
+          <p:cNvPr id="8194" name="Picture 2" descr="4 essential IT KPIs for an effective IT dashboard - Work Life by Atlassian">
+            <a:extLst>
+              <a:ext uri="{FF2B5EF4-FFF2-40B4-BE49-F238E27FC236}">
+                <a16:creationId xmlns:a16="http://schemas.microsoft.com/office/drawing/2014/main" id="{761C6D6E-6FEA-B5F0-D3E5-764C51740C59}"/>
+              </a:ext>
+            </a:extLst>
+          </p:cNvPr>
+          <p:cNvPicPr>
+            <a:picLocks noChangeAspect="1" noChangeArrowheads="1"/>
+          </p:cNvPicPr>
+          <p:nvPr/>
+        </p:nvPicPr>
+        <p:blipFill>
+          <a:blip r:embed="rId2">
+            <a:extLst>
+              <a:ext uri="{28A0092B-C50C-407E-A947-70E740481C1C}">
+                <a14:useLocalDpi xmlns:a14="http://schemas.microsoft.com/office/drawing/2010/main" val="0"/>
+              </a:ext>
+            </a:extLst>
+          </a:blip>
+          <a:srcRect/>
+          <a:stretch>
+            <a:fillRect/>
+          </a:stretch>
+        </p:blipFill>
+        <p:spPr bwMode="auto">
+          <a:xfrm>
+            <a:off x="98854" y="2185141"/>
+            <a:ext cx="6705600" cy="3281204"/>
+          </a:xfrm>
+          <a:prstGeom prst="rect">
+            <a:avLst/>
+          </a:prstGeom>
+          <a:noFill/>
+          <a:extLst>
+            <a:ext uri="{909E8E84-426E-40DD-AFC4-6F175D3DCCD1}">
+              <a14:hiddenFill xmlns:a14="http://schemas.microsoft.com/office/drawing/2010/main">
+                <a:solidFill>
+                  <a:srgbClr val="FFFFFF"/>
+                </a:solidFill>
+              </a14:hiddenFill>
+            </a:ext>
+          </a:extLst>
+        </p:spPr>
+      </p:pic>
+    </p:spTree>
+    <p:extLst>
+      <p:ext uri="{BB962C8B-B14F-4D97-AF65-F5344CB8AC3E}">
+        <p14:creationId xmlns:p14="http://schemas.microsoft.com/office/powerpoint/2010/main" val="2716706350"/>
+      </p:ext>
+    </p:extLst>
+  </p:cSld>
+  <p:clrMapOvr>
+    <a:masterClrMapping/>
+  </p:clrMapOvr>
+</p:sld>
+</file>
+
+<file path=ppt/slides/slide18.xml><?xml version="1.0" encoding="utf-8"?>
+<p:sld xmlns:a="http://schemas.openxmlformats.org/drawingml/2006/main" xmlns:r="http://schemas.openxmlformats.org/officeDocument/2006/relationships" xmlns:p="http://schemas.openxmlformats.org/presentationml/2006/main">
+  <p:cSld>
+    <p:spTree>
+      <p:nvGrpSpPr>
+        <p:cNvPr id="1" name=""/>
+        <p:cNvGrpSpPr/>
+        <p:nvPr/>
+      </p:nvGrpSpPr>
+      <p:grpSpPr>
+        <a:xfrm>
+          <a:off x="0" y="0"/>
+          <a:ext cx="0" cy="0"/>
+          <a:chOff x="0" y="0"/>
+          <a:chExt cx="0" cy="0"/>
+        </a:xfrm>
+      </p:grpSpPr>
+      <p:sp>
+        <p:nvSpPr>
+          <p:cNvPr id="2" name="Title 1">
+            <a:extLst>
+              <a:ext uri="{FF2B5EF4-FFF2-40B4-BE49-F238E27FC236}">
+                <a16:creationId xmlns:a16="http://schemas.microsoft.com/office/drawing/2014/main" id="{132AE25A-96D0-5C32-CFF1-7040E37A4A35}"/>
+              </a:ext>
+            </a:extLst>
+          </p:cNvPr>
+          <p:cNvSpPr>
+            <a:spLocks noGrp="1"/>
+          </p:cNvSpPr>
+          <p:nvPr>
+            <p:ph type="title"/>
+          </p:nvPr>
+        </p:nvSpPr>
+        <p:spPr/>
+        <p:txBody>
+          <a:bodyPr/>
+          <a:lstStyle/>
+          <a:p>
+            <a:r>
+              <a:rPr lang="en-US" dirty="0"/>
+              <a:t>In Tableau…</a:t>
+            </a:r>
+          </a:p>
+        </p:txBody>
+      </p:sp>
+      <p:sp>
+        <p:nvSpPr>
+          <p:cNvPr id="3" name="Content Placeholder 2">
+            <a:extLst>
+              <a:ext uri="{FF2B5EF4-FFF2-40B4-BE49-F238E27FC236}">
+                <a16:creationId xmlns:a16="http://schemas.microsoft.com/office/drawing/2014/main" id="{73401AB1-A357-F1A4-8318-9C79CC277616}"/>
+              </a:ext>
+            </a:extLst>
+          </p:cNvPr>
+          <p:cNvSpPr>
+            <a:spLocks noGrp="1"/>
+          </p:cNvSpPr>
+          <p:nvPr>
+            <p:ph idx="1"/>
+          </p:nvPr>
+        </p:nvSpPr>
+        <p:spPr>
+          <a:xfrm>
+            <a:off x="1451579" y="2015732"/>
+            <a:ext cx="9603275" cy="4037749"/>
+          </a:xfrm>
+        </p:spPr>
+        <p:txBody>
+          <a:bodyPr/>
+          <a:lstStyle/>
+          <a:p>
+            <a:r>
+              <a:rPr lang="en-US" dirty="0"/>
+              <a:t>In Tableau, we can calculate almost any metric via a calculation. </a:t>
+            </a:r>
+          </a:p>
+          <a:p>
+            <a:r>
+              <a:rPr lang="en-US" dirty="0"/>
+              <a:t>We can manipulate the customizations with:</a:t>
+            </a:r>
+          </a:p>
+          <a:p>
+            <a:pPr lvl="1"/>
+            <a:r>
+              <a:rPr lang="en-US" dirty="0"/>
+              <a:t>Parameters. </a:t>
+            </a:r>
+          </a:p>
+          <a:p>
+            <a:pPr lvl="1"/>
+            <a:r>
+              <a:rPr lang="en-US" dirty="0"/>
+              <a:t>Filters. </a:t>
+            </a:r>
+          </a:p>
+          <a:p>
+            <a:pPr lvl="1"/>
+            <a:r>
+              <a:rPr lang="en-US" dirty="0"/>
+              <a:t>Interactions. </a:t>
+            </a:r>
+          </a:p>
+          <a:p>
+            <a:r>
+              <a:rPr lang="en-US" dirty="0"/>
+              <a:t>Some other tools – groups and sets, can help splitting “care vs. not care”. </a:t>
+            </a:r>
+          </a:p>
+          <a:p>
+            <a:endParaRPr lang="en-US" dirty="0"/>
+          </a:p>
+          <a:p>
+            <a:r>
+              <a:rPr lang="en-US" dirty="0"/>
+              <a:t>Lastly, extensions…. Let’s try some. </a:t>
+            </a:r>
+          </a:p>
+        </p:txBody>
+      </p:sp>
+    </p:spTree>
+    <p:extLst>
+      <p:ext uri="{BB962C8B-B14F-4D97-AF65-F5344CB8AC3E}">
+        <p14:creationId xmlns:p14="http://schemas.microsoft.com/office/powerpoint/2010/main" val="1226656858"/>
+      </p:ext>
+    </p:extLst>
+  </p:cSld>
+  <p:clrMapOvr>
+    <a:masterClrMapping/>
+  </p:clrMapOvr>
+</p:sld>
+</file>
+
+<file path=ppt/slides/slide2.xml><?xml version="1.0" encoding="utf-8"?>
+<p:sld xmlns:a="http://schemas.openxmlformats.org/drawingml/2006/main" xmlns:r="http://schemas.openxmlformats.org/officeDocument/2006/relationships" xmlns:p="http://schemas.openxmlformats.org/presentationml/2006/main">
+  <p:cSld>
+    <p:spTree>
+      <p:nvGrpSpPr>
+        <p:cNvPr id="1" name=""/>
+        <p:cNvGrpSpPr/>
+        <p:nvPr/>
+      </p:nvGrpSpPr>
+      <p:grpSpPr>
+        <a:xfrm>
+          <a:off x="0" y="0"/>
+          <a:ext cx="0" cy="0"/>
+          <a:chOff x="0" y="0"/>
+          <a:chExt cx="0" cy="0"/>
+        </a:xfrm>
+      </p:grpSpPr>
+      <p:sp>
+        <p:nvSpPr>
+          <p:cNvPr id="2" name="Title 1">
+            <a:extLst>
+              <a:ext uri="{FF2B5EF4-FFF2-40B4-BE49-F238E27FC236}">
+                <a16:creationId xmlns:a16="http://schemas.microsoft.com/office/drawing/2014/main" id="{FB9710D0-29DE-0059-171F-442FCB72F931}"/>
+              </a:ext>
+            </a:extLst>
+          </p:cNvPr>
+          <p:cNvSpPr>
+            <a:spLocks noGrp="1"/>
+          </p:cNvSpPr>
+          <p:nvPr>
+            <p:ph type="ctrTitle"/>
+          </p:nvPr>
+        </p:nvSpPr>
+        <p:spPr/>
+        <p:txBody>
+          <a:bodyPr/>
+          <a:lstStyle/>
+          <a:p>
+            <a:r>
+              <a:rPr lang="en-US" dirty="0"/>
+              <a:t>Comparison and KPI</a:t>
+            </a:r>
+          </a:p>
+        </p:txBody>
+      </p:sp>
+      <p:sp>
+        <p:nvSpPr>
+          <p:cNvPr id="3" name="Subtitle 2">
+            <a:extLst>
+              <a:ext uri="{FF2B5EF4-FFF2-40B4-BE49-F238E27FC236}">
+                <a16:creationId xmlns:a16="http://schemas.microsoft.com/office/drawing/2014/main" id="{C8745083-32F5-092C-05D7-E3AD85E84AD3}"/>
+              </a:ext>
+            </a:extLst>
+          </p:cNvPr>
+          <p:cNvSpPr>
+            <a:spLocks noGrp="1"/>
+          </p:cNvSpPr>
+          <p:nvPr>
+            <p:ph type="subTitle" idx="1"/>
+          </p:nvPr>
+        </p:nvSpPr>
+        <p:spPr/>
+        <p:txBody>
+          <a:bodyPr/>
+          <a:lstStyle/>
+          <a:p>
+            <a:endParaRPr lang="en-US"/>
+          </a:p>
+        </p:txBody>
+      </p:sp>
+    </p:spTree>
+    <p:extLst>
+      <p:ext uri="{BB962C8B-B14F-4D97-AF65-F5344CB8AC3E}">
+        <p14:creationId xmlns:p14="http://schemas.microsoft.com/office/powerpoint/2010/main" val="1509454297"/>
+      </p:ext>
+    </p:extLst>
+  </p:cSld>
+  <p:clrMapOvr>
+    <a:masterClrMapping/>
+  </p:clrMapOvr>
+</p:sld>
+</file>
+
+<file path=ppt/slides/slide3.xml><?xml version="1.0" encoding="utf-8"?>
+<p:sld xmlns:a="http://schemas.openxmlformats.org/drawingml/2006/main" xmlns:r="http://schemas.openxmlformats.org/officeDocument/2006/relationships" xmlns:p="http://schemas.openxmlformats.org/presentationml/2006/main">
+  <p:cSld>
+    <p:spTree>
+      <p:nvGrpSpPr>
+        <p:cNvPr id="1" name=""/>
+        <p:cNvGrpSpPr/>
+        <p:nvPr/>
+      </p:nvGrpSpPr>
+      <p:grpSpPr>
+        <a:xfrm>
+          <a:off x="0" y="0"/>
+          <a:ext cx="0" cy="0"/>
+          <a:chOff x="0" y="0"/>
+          <a:chExt cx="0" cy="0"/>
+        </a:xfrm>
+      </p:grpSpPr>
+      <p:sp>
+        <p:nvSpPr>
+          <p:cNvPr id="2" name="Title 1">
+            <a:extLst>
+              <a:ext uri="{FF2B5EF4-FFF2-40B4-BE49-F238E27FC236}">
+                <a16:creationId xmlns:a16="http://schemas.microsoft.com/office/drawing/2014/main" id="{5F1BE3E2-1AC3-005C-982B-70302C07EE16}"/>
+              </a:ext>
+            </a:extLst>
+          </p:cNvPr>
+          <p:cNvSpPr>
+            <a:spLocks noGrp="1"/>
+          </p:cNvSpPr>
+          <p:nvPr>
+            <p:ph type="title"/>
+          </p:nvPr>
+        </p:nvSpPr>
+        <p:spPr/>
+        <p:txBody>
+          <a:bodyPr/>
+          <a:lstStyle/>
+          <a:p>
+            <a:r>
+              <a:rPr lang="en-US" dirty="0"/>
+              <a:t>Compare things</a:t>
+            </a:r>
+          </a:p>
+        </p:txBody>
+      </p:sp>
+      <p:sp>
+        <p:nvSpPr>
+          <p:cNvPr id="3" name="Content Placeholder 2">
+            <a:extLst>
+              <a:ext uri="{FF2B5EF4-FFF2-40B4-BE49-F238E27FC236}">
+                <a16:creationId xmlns:a16="http://schemas.microsoft.com/office/drawing/2014/main" id="{EB5E9E70-9629-C5C1-5500-100167C1ACA6}"/>
+              </a:ext>
+            </a:extLst>
+          </p:cNvPr>
+          <p:cNvSpPr>
+            <a:spLocks noGrp="1"/>
+          </p:cNvSpPr>
+          <p:nvPr>
+            <p:ph idx="1"/>
+          </p:nvPr>
+        </p:nvSpPr>
+        <p:spPr>
+          <a:xfrm>
+            <a:off x="1451579" y="2015732"/>
+            <a:ext cx="9603275" cy="3864073"/>
+          </a:xfrm>
+        </p:spPr>
+        <p:txBody>
+          <a:bodyPr/>
+          <a:lstStyle/>
+          <a:p>
+            <a:r>
+              <a:rPr lang="en-US" dirty="0"/>
+              <a:t>One important tool of visualizations is to allow comparison. </a:t>
+            </a:r>
+          </a:p>
+          <a:p>
+            <a:pPr lvl="1"/>
+            <a:r>
+              <a:rPr lang="en-US" dirty="0"/>
+              <a:t>We can let users customize some details. </a:t>
+            </a:r>
+          </a:p>
+          <a:p>
+            <a:pPr lvl="1"/>
+            <a:r>
+              <a:rPr lang="en-US" dirty="0"/>
+              <a:t>Tableau can recalculate things on the fly. </a:t>
+            </a:r>
+          </a:p>
+          <a:p>
+            <a:r>
+              <a:rPr lang="en-US" dirty="0"/>
+              <a:t>On ‘business’ dashboards, this is common. </a:t>
+            </a:r>
+          </a:p>
+          <a:p>
+            <a:pPr lvl="1"/>
+            <a:r>
+              <a:rPr lang="en-US" dirty="0"/>
+              <a:t>Focus on one store/product/department. </a:t>
+            </a:r>
+          </a:p>
+          <a:p>
+            <a:r>
+              <a:rPr lang="en-US" dirty="0"/>
+              <a:t>Facilitates KPI – key performance indicators. </a:t>
+            </a:r>
+          </a:p>
+          <a:p>
+            <a:pPr lvl="1"/>
+            <a:r>
+              <a:rPr lang="en-US" dirty="0"/>
+              <a:t>Identify core values, monitor them. </a:t>
+            </a:r>
+          </a:p>
+        </p:txBody>
+      </p:sp>
+      <p:pic>
+        <p:nvPicPr>
+          <p:cNvPr id="1026" name="Picture 2" descr="How to Create Persistent Comparison Sets Across Tableau Dashboards">
+            <a:extLst>
+              <a:ext uri="{FF2B5EF4-FFF2-40B4-BE49-F238E27FC236}">
+                <a16:creationId xmlns:a16="http://schemas.microsoft.com/office/drawing/2014/main" id="{BA2CE2C5-65AA-9DAF-3D07-6F8DDAD1FDC7}"/>
+              </a:ext>
+            </a:extLst>
+          </p:cNvPr>
+          <p:cNvPicPr>
+            <a:picLocks noChangeAspect="1" noChangeArrowheads="1"/>
+          </p:cNvPicPr>
+          <p:nvPr/>
+        </p:nvPicPr>
+        <p:blipFill>
+          <a:blip r:embed="rId2">
+            <a:extLst>
+              <a:ext uri="{28A0092B-C50C-407E-A947-70E740481C1C}">
+                <a14:useLocalDpi xmlns:a14="http://schemas.microsoft.com/office/drawing/2010/main" val="0"/>
+              </a:ext>
+            </a:extLst>
+          </a:blip>
+          <a:srcRect/>
+          <a:stretch>
+            <a:fillRect/>
+          </a:stretch>
+        </p:blipFill>
+        <p:spPr bwMode="auto">
+          <a:xfrm>
+            <a:off x="6560289" y="2543654"/>
+            <a:ext cx="5514753" cy="4089209"/>
+          </a:xfrm>
+          <a:prstGeom prst="rect">
+            <a:avLst/>
+          </a:prstGeom>
+          <a:noFill/>
+          <a:extLst>
+            <a:ext uri="{909E8E84-426E-40DD-AFC4-6F175D3DCCD1}">
+              <a14:hiddenFill xmlns:a14="http://schemas.microsoft.com/office/drawing/2010/main">
+                <a:solidFill>
+                  <a:srgbClr val="FFFFFF"/>
+                </a:solidFill>
+              </a14:hiddenFill>
+            </a:ext>
+          </a:extLst>
+        </p:spPr>
+      </p:pic>
+    </p:spTree>
+    <p:extLst>
+      <p:ext uri="{BB962C8B-B14F-4D97-AF65-F5344CB8AC3E}">
+        <p14:creationId xmlns:p14="http://schemas.microsoft.com/office/powerpoint/2010/main" val="132175247"/>
+      </p:ext>
+    </p:extLst>
+  </p:cSld>
+  <p:clrMapOvr>
+    <a:masterClrMapping/>
+  </p:clrMapOvr>
+</p:sld>
+</file>
+
+<file path=ppt/slides/slide4.xml><?xml version="1.0" encoding="utf-8"?>
+<p:sld xmlns:a="http://schemas.openxmlformats.org/drawingml/2006/main" xmlns:r="http://schemas.openxmlformats.org/officeDocument/2006/relationships" xmlns:p="http://schemas.openxmlformats.org/presentationml/2006/main">
+  <p:cSld>
+    <p:spTree>
+      <p:nvGrpSpPr>
+        <p:cNvPr id="1" name=""/>
+        <p:cNvGrpSpPr/>
+        <p:nvPr/>
+      </p:nvGrpSpPr>
+      <p:grpSpPr>
+        <a:xfrm>
+          <a:off x="0" y="0"/>
+          <a:ext cx="0" cy="0"/>
+          <a:chOff x="0" y="0"/>
+          <a:chExt cx="0" cy="0"/>
+        </a:xfrm>
+      </p:grpSpPr>
+      <p:sp>
+        <p:nvSpPr>
+          <p:cNvPr id="2" name="Title 1">
+            <a:extLst>
+              <a:ext uri="{FF2B5EF4-FFF2-40B4-BE49-F238E27FC236}">
+                <a16:creationId xmlns:a16="http://schemas.microsoft.com/office/drawing/2014/main" id="{99D303A1-CBA4-8323-8EB1-EC1673CC35D2}"/>
+              </a:ext>
+            </a:extLst>
+          </p:cNvPr>
+          <p:cNvSpPr>
+            <a:spLocks noGrp="1"/>
+          </p:cNvSpPr>
+          <p:nvPr>
+            <p:ph type="title"/>
+          </p:nvPr>
+        </p:nvSpPr>
+        <p:spPr/>
+        <p:txBody>
+          <a:bodyPr/>
+          <a:lstStyle/>
+          <a:p>
+            <a:r>
+              <a:rPr lang="en-US" dirty="0"/>
+              <a:t>Key Performance Indicators</a:t>
+            </a:r>
+          </a:p>
+        </p:txBody>
+      </p:sp>
+      <p:sp>
+        <p:nvSpPr>
+          <p:cNvPr id="3" name="Content Placeholder 2">
+            <a:extLst>
+              <a:ext uri="{FF2B5EF4-FFF2-40B4-BE49-F238E27FC236}">
+                <a16:creationId xmlns:a16="http://schemas.microsoft.com/office/drawing/2014/main" id="{EE5D0096-5553-EC5A-63E3-6F73CA7FE010}"/>
+              </a:ext>
+            </a:extLst>
+          </p:cNvPr>
+          <p:cNvSpPr>
+            <a:spLocks noGrp="1"/>
+          </p:cNvSpPr>
+          <p:nvPr>
+            <p:ph idx="1"/>
+          </p:nvPr>
+        </p:nvSpPr>
+        <p:spPr>
+          <a:xfrm>
+            <a:off x="6253215" y="2015732"/>
+            <a:ext cx="5804105" cy="3976577"/>
+          </a:xfrm>
+        </p:spPr>
+        <p:txBody>
+          <a:bodyPr/>
+          <a:lstStyle/>
+          <a:p>
+            <a:r>
+              <a:rPr lang="en-US" dirty="0"/>
+              <a:t>KPIs are metrics that organizations identify as being critical for success. </a:t>
+            </a:r>
+          </a:p>
+          <a:p>
+            <a:r>
+              <a:rPr lang="en-US" dirty="0"/>
+              <a:t>Specific – we can know definitively if we </a:t>
+            </a:r>
+            <a:r>
+              <a:rPr lang="en-US" dirty="0" err="1"/>
+              <a:t>acheive</a:t>
+            </a:r>
+            <a:r>
+              <a:rPr lang="en-US" dirty="0"/>
+              <a:t> it. </a:t>
+            </a:r>
+          </a:p>
+          <a:p>
+            <a:r>
+              <a:rPr lang="en-US" dirty="0"/>
+              <a:t>Time bound – we have limits on when it can occur. </a:t>
+            </a:r>
+          </a:p>
+          <a:p>
+            <a:r>
+              <a:rPr lang="en-US" dirty="0"/>
+              <a:t>Measurable – it is objective. </a:t>
+            </a:r>
+          </a:p>
+          <a:p>
+            <a:r>
+              <a:rPr lang="en-US" dirty="0"/>
+              <a:t>Attainable – it is realistic to achieve. </a:t>
+            </a:r>
+          </a:p>
+          <a:p>
+            <a:r>
+              <a:rPr lang="en-US" dirty="0"/>
+              <a:t>Relevant – it matters to success. </a:t>
+            </a:r>
+          </a:p>
+        </p:txBody>
+      </p:sp>
+      <p:pic>
+        <p:nvPicPr>
+          <p:cNvPr id="2050" name="Picture 2" descr="What are KPIs and how should you use them to increase sales?">
+            <a:extLst>
+              <a:ext uri="{FF2B5EF4-FFF2-40B4-BE49-F238E27FC236}">
+                <a16:creationId xmlns:a16="http://schemas.microsoft.com/office/drawing/2014/main" id="{0CE4E531-3508-27D9-6AAF-2AD3F926F12A}"/>
+              </a:ext>
+            </a:extLst>
+          </p:cNvPr>
+          <p:cNvPicPr>
+            <a:picLocks noChangeAspect="1" noChangeArrowheads="1"/>
+          </p:cNvPicPr>
+          <p:nvPr/>
+        </p:nvPicPr>
+        <p:blipFill>
+          <a:blip r:embed="rId2">
+            <a:extLst>
+              <a:ext uri="{28A0092B-C50C-407E-A947-70E740481C1C}">
+                <a14:useLocalDpi xmlns:a14="http://schemas.microsoft.com/office/drawing/2010/main" val="0"/>
+              </a:ext>
+            </a:extLst>
+          </a:blip>
+          <a:srcRect/>
+          <a:stretch>
+            <a:fillRect/>
+          </a:stretch>
+        </p:blipFill>
+        <p:spPr bwMode="auto">
+          <a:xfrm>
+            <a:off x="39814" y="2015732"/>
+            <a:ext cx="6213402" cy="3976577"/>
+          </a:xfrm>
+          <a:prstGeom prst="rect">
+            <a:avLst/>
+          </a:prstGeom>
+          <a:noFill/>
+          <a:extLst>
+            <a:ext uri="{909E8E84-426E-40DD-AFC4-6F175D3DCCD1}">
+              <a14:hiddenFill xmlns:a14="http://schemas.microsoft.com/office/drawing/2010/main">
+                <a:solidFill>
+                  <a:srgbClr val="FFFFFF"/>
+                </a:solidFill>
+              </a14:hiddenFill>
+            </a:ext>
+          </a:extLst>
+        </p:spPr>
+      </p:pic>
+    </p:spTree>
+    <p:extLst>
+      <p:ext uri="{BB962C8B-B14F-4D97-AF65-F5344CB8AC3E}">
+        <p14:creationId xmlns:p14="http://schemas.microsoft.com/office/powerpoint/2010/main" val="2369160108"/>
+      </p:ext>
+    </p:extLst>
+  </p:cSld>
+  <p:clrMapOvr>
+    <a:masterClrMapping/>
+  </p:clrMapOvr>
+</p:sld>
+</file>
+
+<file path=ppt/slides/slide5.xml><?xml version="1.0" encoding="utf-8"?>
+<p:sld xmlns:a="http://schemas.openxmlformats.org/drawingml/2006/main" xmlns:r="http://schemas.openxmlformats.org/officeDocument/2006/relationships" xmlns:p="http://schemas.openxmlformats.org/presentationml/2006/main">
+  <p:cSld>
+    <p:spTree>
+      <p:nvGrpSpPr>
+        <p:cNvPr id="1" name=""/>
+        <p:cNvGrpSpPr/>
+        <p:nvPr/>
+      </p:nvGrpSpPr>
+      <p:grpSpPr>
+        <a:xfrm>
+          <a:off x="0" y="0"/>
+          <a:ext cx="0" cy="0"/>
+          <a:chOff x="0" y="0"/>
+          <a:chExt cx="0" cy="0"/>
+        </a:xfrm>
+      </p:grpSpPr>
+      <p:sp>
+        <p:nvSpPr>
+          <p:cNvPr id="2" name="Title 1">
+            <a:extLst>
+              <a:ext uri="{FF2B5EF4-FFF2-40B4-BE49-F238E27FC236}">
+                <a16:creationId xmlns:a16="http://schemas.microsoft.com/office/drawing/2014/main" id="{4663A77C-3F7E-83A9-547A-556999C0C060}"/>
+              </a:ext>
+            </a:extLst>
+          </p:cNvPr>
+          <p:cNvSpPr>
+            <a:spLocks noGrp="1"/>
+          </p:cNvSpPr>
+          <p:nvPr>
+            <p:ph type="title"/>
+          </p:nvPr>
+        </p:nvSpPr>
+        <p:spPr/>
+        <p:txBody>
+          <a:bodyPr/>
+          <a:lstStyle/>
+          <a:p>
+            <a:r>
+              <a:rPr lang="en-US" dirty="0"/>
+              <a:t>Leading vs Lagging</a:t>
+            </a:r>
+          </a:p>
+        </p:txBody>
+      </p:sp>
+      <p:sp>
+        <p:nvSpPr>
+          <p:cNvPr id="3" name="Content Placeholder 2">
+            <a:extLst>
+              <a:ext uri="{FF2B5EF4-FFF2-40B4-BE49-F238E27FC236}">
+                <a16:creationId xmlns:a16="http://schemas.microsoft.com/office/drawing/2014/main" id="{79922DAA-2DAB-E79B-771A-C3A875A21719}"/>
+              </a:ext>
+            </a:extLst>
+          </p:cNvPr>
+          <p:cNvSpPr>
+            <a:spLocks noGrp="1"/>
+          </p:cNvSpPr>
+          <p:nvPr>
+            <p:ph idx="1"/>
+          </p:nvPr>
+        </p:nvSpPr>
+        <p:spPr>
+          <a:xfrm>
+            <a:off x="6991865" y="2015732"/>
+            <a:ext cx="5066270" cy="3875771"/>
+          </a:xfrm>
+        </p:spPr>
+        <p:txBody>
+          <a:bodyPr/>
+          <a:lstStyle/>
+          <a:p>
+            <a:r>
+              <a:rPr lang="en-US" dirty="0"/>
+              <a:t>KPIs can be leading or lagging. </a:t>
+            </a:r>
+          </a:p>
+          <a:p>
+            <a:r>
+              <a:rPr lang="en-US" dirty="0"/>
+              <a:t>Leading:</a:t>
+            </a:r>
+          </a:p>
+          <a:p>
+            <a:pPr lvl="1"/>
+            <a:r>
+              <a:rPr lang="en-US" dirty="0"/>
+              <a:t>An indicator that something will happen. </a:t>
+            </a:r>
+          </a:p>
+          <a:p>
+            <a:pPr lvl="1"/>
+            <a:r>
+              <a:rPr lang="en-US" dirty="0"/>
+              <a:t>Store traffic indicates future sales. </a:t>
+            </a:r>
+          </a:p>
+          <a:p>
+            <a:r>
+              <a:rPr lang="en-US" dirty="0"/>
+              <a:t>Lagging:</a:t>
+            </a:r>
+          </a:p>
+          <a:p>
+            <a:pPr lvl="1"/>
+            <a:r>
+              <a:rPr lang="en-US" dirty="0"/>
+              <a:t>An indicator something has happened. </a:t>
+            </a:r>
+          </a:p>
+          <a:p>
+            <a:pPr lvl="1"/>
+            <a:r>
+              <a:rPr lang="en-US" dirty="0"/>
+              <a:t>Conversion rate on web visitors to buyers.</a:t>
+            </a:r>
+          </a:p>
+          <a:p>
+            <a:r>
+              <a:rPr lang="en-US" dirty="0"/>
+              <a:t>Both ultimately guide behavior (ideally). </a:t>
+            </a:r>
+          </a:p>
+        </p:txBody>
+      </p:sp>
+      <p:pic>
+        <p:nvPicPr>
+          <p:cNvPr id="3074" name="Picture 2" descr="HR KPIs: Guide, 20 Examples &amp; Free Template - AIHR">
+            <a:extLst>
+              <a:ext uri="{FF2B5EF4-FFF2-40B4-BE49-F238E27FC236}">
+                <a16:creationId xmlns:a16="http://schemas.microsoft.com/office/drawing/2014/main" id="{C6AC7AC8-F472-7D08-316A-5F0BE2925973}"/>
+              </a:ext>
+            </a:extLst>
+          </p:cNvPr>
+          <p:cNvPicPr>
+            <a:picLocks noChangeAspect="1" noChangeArrowheads="1"/>
+          </p:cNvPicPr>
+          <p:nvPr/>
+        </p:nvPicPr>
+        <p:blipFill rotWithShape="1">
+          <a:blip r:embed="rId2">
+            <a:extLst>
+              <a:ext uri="{28A0092B-C50C-407E-A947-70E740481C1C}">
+                <a14:useLocalDpi xmlns:a14="http://schemas.microsoft.com/office/drawing/2010/main" val="0"/>
+              </a:ext>
+            </a:extLst>
+          </a:blip>
+          <a:srcRect t="29392" b="11731"/>
+          <a:stretch>
+            <a:fillRect/>
+          </a:stretch>
+        </p:blipFill>
+        <p:spPr bwMode="auto">
+          <a:xfrm>
+            <a:off x="133865" y="1853754"/>
+            <a:ext cx="6858000" cy="4037749"/>
+          </a:xfrm>
+          <a:prstGeom prst="rect">
+            <a:avLst/>
+          </a:prstGeom>
+          <a:noFill/>
+          <a:extLst>
+            <a:ext uri="{909E8E84-426E-40DD-AFC4-6F175D3DCCD1}">
+              <a14:hiddenFill xmlns:a14="http://schemas.microsoft.com/office/drawing/2010/main">
+                <a:solidFill>
+                  <a:srgbClr val="FFFFFF"/>
+                </a:solidFill>
+              </a14:hiddenFill>
+            </a:ext>
+          </a:extLst>
+        </p:spPr>
+      </p:pic>
+    </p:spTree>
+    <p:extLst>
+      <p:ext uri="{BB962C8B-B14F-4D97-AF65-F5344CB8AC3E}">
+        <p14:creationId xmlns:p14="http://schemas.microsoft.com/office/powerpoint/2010/main" val="15203137"/>
+      </p:ext>
+    </p:extLst>
+  </p:cSld>
+  <p:clrMapOvr>
+    <a:masterClrMapping/>
+  </p:clrMapOvr>
+</p:sld>
+</file>
+
+<file path=ppt/slides/slide6.xml><?xml version="1.0" encoding="utf-8"?>
+<p:sld xmlns:a="http://schemas.openxmlformats.org/drawingml/2006/main" xmlns:r="http://schemas.openxmlformats.org/officeDocument/2006/relationships" xmlns:p="http://schemas.openxmlformats.org/presentationml/2006/main">
+  <p:cSld>
+    <p:spTree>
+      <p:nvGrpSpPr>
+        <p:cNvPr id="1" name=""/>
+        <p:cNvGrpSpPr/>
+        <p:nvPr/>
+      </p:nvGrpSpPr>
+      <p:grpSpPr>
+        <a:xfrm>
+          <a:off x="0" y="0"/>
+          <a:ext cx="0" cy="0"/>
+          <a:chOff x="0" y="0"/>
+          <a:chExt cx="0" cy="0"/>
+        </a:xfrm>
+      </p:grpSpPr>
+      <p:sp>
+        <p:nvSpPr>
+          <p:cNvPr id="2" name="Title 1">
+            <a:extLst>
+              <a:ext uri="{FF2B5EF4-FFF2-40B4-BE49-F238E27FC236}">
+                <a16:creationId xmlns:a16="http://schemas.microsoft.com/office/drawing/2014/main" id="{4E12EB43-A4FA-BF0F-0D31-43B916319315}"/>
+              </a:ext>
+            </a:extLst>
+          </p:cNvPr>
+          <p:cNvSpPr>
+            <a:spLocks noGrp="1"/>
+          </p:cNvSpPr>
+          <p:nvPr>
+            <p:ph type="title"/>
+          </p:nvPr>
+        </p:nvSpPr>
+        <p:spPr/>
+        <p:txBody>
+          <a:bodyPr/>
+          <a:lstStyle/>
+          <a:p>
+            <a:endParaRPr lang="en-US" dirty="0"/>
+          </a:p>
+        </p:txBody>
+      </p:sp>
+      <p:sp>
+        <p:nvSpPr>
+          <p:cNvPr id="3" name="Content Placeholder 2">
+            <a:extLst>
+              <a:ext uri="{FF2B5EF4-FFF2-40B4-BE49-F238E27FC236}">
+                <a16:creationId xmlns:a16="http://schemas.microsoft.com/office/drawing/2014/main" id="{C9571E49-963A-8F96-8BE4-A884891E9736}"/>
+              </a:ext>
+            </a:extLst>
+          </p:cNvPr>
+          <p:cNvSpPr>
+            <a:spLocks noGrp="1"/>
+          </p:cNvSpPr>
+          <p:nvPr>
+            <p:ph idx="1"/>
+          </p:nvPr>
+        </p:nvSpPr>
+        <p:spPr/>
+        <p:txBody>
+          <a:bodyPr/>
+          <a:lstStyle/>
+          <a:p>
+            <a:endParaRPr lang="en-US"/>
+          </a:p>
+        </p:txBody>
+      </p:sp>
+    </p:spTree>
+    <p:extLst>
+      <p:ext uri="{BB962C8B-B14F-4D97-AF65-F5344CB8AC3E}">
+        <p14:creationId xmlns:p14="http://schemas.microsoft.com/office/powerpoint/2010/main" val="2413836588"/>
+      </p:ext>
+    </p:extLst>
+  </p:cSld>
+  <p:clrMapOvr>
+    <a:masterClrMapping/>
+  </p:clrMapOvr>
+</p:sld>
+</file>
+
+<file path=ppt/slides/slide7.xml><?xml version="1.0" encoding="utf-8"?>
+<p:sld xmlns:a="http://schemas.openxmlformats.org/drawingml/2006/main" xmlns:r="http://schemas.openxmlformats.org/officeDocument/2006/relationships" xmlns:p="http://schemas.openxmlformats.org/presentationml/2006/main">
+  <p:cSld>
+    <p:spTree>
+      <p:nvGrpSpPr>
+        <p:cNvPr id="1" name=""/>
+        <p:cNvGrpSpPr/>
+        <p:nvPr/>
+      </p:nvGrpSpPr>
+      <p:grpSpPr>
+        <a:xfrm>
+          <a:off x="0" y="0"/>
+          <a:ext cx="0" cy="0"/>
+          <a:chOff x="0" y="0"/>
+          <a:chExt cx="0" cy="0"/>
+        </a:xfrm>
+      </p:grpSpPr>
+      <p:sp>
+        <p:nvSpPr>
+          <p:cNvPr id="2" name="Title 1">
+            <a:extLst>
+              <a:ext uri="{FF2B5EF4-FFF2-40B4-BE49-F238E27FC236}">
+                <a16:creationId xmlns:a16="http://schemas.microsoft.com/office/drawing/2014/main" id="{52AA0E2D-CF82-5CD6-82F5-9AE8C1DA8F8E}"/>
+              </a:ext>
+            </a:extLst>
+          </p:cNvPr>
+          <p:cNvSpPr>
+            <a:spLocks noGrp="1"/>
+          </p:cNvSpPr>
+          <p:nvPr>
+            <p:ph type="title"/>
+          </p:nvPr>
+        </p:nvSpPr>
+        <p:spPr/>
+        <p:txBody>
+          <a:bodyPr/>
+          <a:lstStyle/>
+          <a:p>
+            <a:r>
+              <a:rPr lang="en-US" dirty="0"/>
+              <a:t>Developing KPIs</a:t>
+            </a:r>
+          </a:p>
+        </p:txBody>
+      </p:sp>
+      <p:sp>
+        <p:nvSpPr>
+          <p:cNvPr id="3" name="Content Placeholder 2">
+            <a:extLst>
+              <a:ext uri="{FF2B5EF4-FFF2-40B4-BE49-F238E27FC236}">
+                <a16:creationId xmlns:a16="http://schemas.microsoft.com/office/drawing/2014/main" id="{67015E79-AA17-0157-3DF3-EEA13229E314}"/>
+              </a:ext>
+            </a:extLst>
+          </p:cNvPr>
+          <p:cNvSpPr>
+            <a:spLocks noGrp="1"/>
+          </p:cNvSpPr>
+          <p:nvPr>
+            <p:ph idx="1"/>
+          </p:nvPr>
+        </p:nvSpPr>
+        <p:spPr>
+          <a:xfrm>
+            <a:off x="1451579" y="1853755"/>
+            <a:ext cx="10020951" cy="4199726"/>
+          </a:xfrm>
+        </p:spPr>
+        <p:txBody>
+          <a:bodyPr/>
+          <a:lstStyle/>
+          <a:p>
+            <a:r>
+              <a:rPr lang="en-US" dirty="0"/>
+              <a:t>KPIs will differ depending on organization and circumstances. </a:t>
+            </a:r>
+          </a:p>
+          <a:p>
+            <a:r>
+              <a:rPr lang="en-US" dirty="0"/>
+              <a:t>The goal is to, as best as possible, summarize the performance of the org in a few values. </a:t>
+            </a:r>
+          </a:p>
+          <a:p>
+            <a:pPr lvl="1"/>
+            <a:r>
+              <a:rPr lang="en-US" dirty="0"/>
+              <a:t>I.e. if these metrics look good, we are doing well. </a:t>
+            </a:r>
+          </a:p>
+          <a:p>
+            <a:r>
+              <a:rPr lang="en-US" dirty="0"/>
+              <a:t>Broad consideration – financials are included, but not the only thing. </a:t>
+            </a:r>
+          </a:p>
+          <a:p>
+            <a:pPr lvl="1"/>
+            <a:r>
+              <a:rPr lang="en-US" dirty="0"/>
+              <a:t>Customer opinion, job applicant quality, social media mentions, supplier limits, </a:t>
+            </a:r>
+            <a:r>
+              <a:rPr lang="en-US" dirty="0" err="1"/>
+              <a:t>etc</a:t>
+            </a:r>
+            <a:r>
+              <a:rPr lang="en-US" dirty="0"/>
+              <a:t>…</a:t>
+            </a:r>
+          </a:p>
+          <a:p>
+            <a:r>
+              <a:rPr lang="en-US" dirty="0"/>
+              <a:t>Stakeholder consultation – ‘success’ for different departments may be different. </a:t>
+            </a:r>
+          </a:p>
+          <a:p>
+            <a:pPr lvl="1"/>
+            <a:r>
+              <a:rPr lang="en-US" dirty="0"/>
+              <a:t>The process of identifying KPIs can help reveal this*. </a:t>
+            </a:r>
+          </a:p>
+          <a:p>
+            <a:r>
+              <a:rPr lang="en-US" dirty="0"/>
+              <a:t>Relevance (again) – easy to measure != important. Important things may be hard to measure. </a:t>
+            </a:r>
+          </a:p>
+        </p:txBody>
+      </p:sp>
+    </p:spTree>
+    <p:extLst>
+      <p:ext uri="{BB962C8B-B14F-4D97-AF65-F5344CB8AC3E}">
+        <p14:creationId xmlns:p14="http://schemas.microsoft.com/office/powerpoint/2010/main" val="619007314"/>
+      </p:ext>
+    </p:extLst>
+  </p:cSld>
+  <p:clrMapOvr>
+    <a:masterClrMapping/>
+  </p:clrMapOvr>
+</p:sld>
+</file>
+
+<file path=ppt/slides/slide8.xml><?xml version="1.0" encoding="utf-8"?>
+<p:sld xmlns:a="http://schemas.openxmlformats.org/drawingml/2006/main" xmlns:r="http://schemas.openxmlformats.org/officeDocument/2006/relationships" xmlns:p="http://schemas.openxmlformats.org/presentationml/2006/main">
+  <p:cSld>
+    <p:spTree>
+      <p:nvGrpSpPr>
+        <p:cNvPr id="1" name=""/>
+        <p:cNvGrpSpPr/>
+        <p:nvPr/>
+      </p:nvGrpSpPr>
+      <p:grpSpPr>
+        <a:xfrm>
+          <a:off x="0" y="0"/>
+          <a:ext cx="0" cy="0"/>
+          <a:chOff x="0" y="0"/>
+          <a:chExt cx="0" cy="0"/>
+        </a:xfrm>
+      </p:grpSpPr>
+      <p:sp>
+        <p:nvSpPr>
+          <p:cNvPr id="2" name="Title 1">
+            <a:extLst>
+              <a:ext uri="{FF2B5EF4-FFF2-40B4-BE49-F238E27FC236}">
+                <a16:creationId xmlns:a16="http://schemas.microsoft.com/office/drawing/2014/main" id="{B8762FDE-1ECC-D0D2-E76F-6470B690E393}"/>
+              </a:ext>
+            </a:extLst>
+          </p:cNvPr>
+          <p:cNvSpPr>
+            <a:spLocks noGrp="1"/>
+          </p:cNvSpPr>
+          <p:nvPr>
+            <p:ph type="title"/>
+          </p:nvPr>
+        </p:nvSpPr>
+        <p:spPr/>
+        <p:txBody>
+          <a:bodyPr/>
+          <a:lstStyle/>
+          <a:p>
+            <a:r>
+              <a:rPr lang="en-US" dirty="0"/>
+              <a:t>Thresholds</a:t>
+            </a:r>
+          </a:p>
+        </p:txBody>
+      </p:sp>
+      <p:sp>
+        <p:nvSpPr>
+          <p:cNvPr id="3" name="Content Placeholder 2">
+            <a:extLst>
+              <a:ext uri="{FF2B5EF4-FFF2-40B4-BE49-F238E27FC236}">
+                <a16:creationId xmlns:a16="http://schemas.microsoft.com/office/drawing/2014/main" id="{A39DB3AE-84CD-62B1-397B-CC7398BF7065}"/>
+              </a:ext>
+            </a:extLst>
+          </p:cNvPr>
+          <p:cNvSpPr>
+            <a:spLocks noGrp="1"/>
+          </p:cNvSpPr>
+          <p:nvPr>
+            <p:ph idx="1"/>
+          </p:nvPr>
+        </p:nvSpPr>
+        <p:spPr>
+          <a:xfrm>
+            <a:off x="1451579" y="1933903"/>
+            <a:ext cx="9603275" cy="4193627"/>
+          </a:xfrm>
+        </p:spPr>
+        <p:txBody>
+          <a:bodyPr/>
+          <a:lstStyle/>
+          <a:p>
+            <a:r>
+              <a:rPr lang="en-US" dirty="0"/>
+              <a:t>Another factor that we often consider with KPIs is a threshold.</a:t>
+            </a:r>
+          </a:p>
+          <a:p>
+            <a:pPr lvl="1"/>
+            <a:r>
+              <a:rPr lang="en-US" dirty="0"/>
+              <a:t>Criteria for what value signals good/bad limits. </a:t>
+            </a:r>
+          </a:p>
+          <a:p>
+            <a:pPr lvl="1"/>
+            <a:r>
+              <a:rPr lang="en-US" dirty="0"/>
+              <a:t>E.g. gauges in car – red line is the RPM threshold, temperature range. </a:t>
+            </a:r>
+          </a:p>
+          <a:p>
+            <a:r>
+              <a:rPr lang="en-US" dirty="0"/>
+              <a:t>Simplify analysis by focusing only on cases where there’s an issue. </a:t>
+            </a:r>
+          </a:p>
+          <a:p>
+            <a:r>
+              <a:rPr lang="en-US" dirty="0"/>
+              <a:t>Real life example – banker training at ATB. </a:t>
+            </a:r>
+          </a:p>
+          <a:p>
+            <a:pPr lvl="1"/>
+            <a:r>
+              <a:rPr lang="en-US" dirty="0"/>
+              <a:t>We had many people in a ~6 month long </a:t>
+            </a:r>
+            <a:r>
+              <a:rPr lang="en-US" dirty="0" err="1"/>
+              <a:t>otj</a:t>
+            </a:r>
+            <a:r>
+              <a:rPr lang="en-US" dirty="0"/>
+              <a:t> training program. </a:t>
+            </a:r>
+          </a:p>
+          <a:p>
+            <a:pPr lvl="1"/>
+            <a:r>
+              <a:rPr lang="en-US" dirty="0"/>
+              <a:t>Need to monitor number of trainees, pacing, </a:t>
+            </a:r>
+            <a:r>
+              <a:rPr lang="en-US" dirty="0" err="1"/>
+              <a:t>etc</a:t>
+            </a:r>
+            <a:r>
+              <a:rPr lang="en-US" dirty="0"/>
+              <a:t>…</a:t>
+            </a:r>
+          </a:p>
+          <a:p>
+            <a:pPr lvl="1"/>
+            <a:r>
+              <a:rPr lang="en-US" dirty="0"/>
+              <a:t>Threshold – green/yellow/red light indicator for pace based on # of course items complete and major milestones. </a:t>
+            </a:r>
+          </a:p>
+          <a:p>
+            <a:pPr lvl="1"/>
+            <a:r>
+              <a:rPr lang="en-US" dirty="0"/>
+              <a:t>Greens don’t need interventions, yellow need subtle, red is concern. </a:t>
+            </a:r>
+          </a:p>
+        </p:txBody>
+      </p:sp>
+    </p:spTree>
+    <p:extLst>
+      <p:ext uri="{BB962C8B-B14F-4D97-AF65-F5344CB8AC3E}">
+        <p14:creationId xmlns:p14="http://schemas.microsoft.com/office/powerpoint/2010/main" val="4283925720"/>
+      </p:ext>
+    </p:extLst>
+  </p:cSld>
+  <p:clrMapOvr>
+    <a:masterClrMapping/>
+  </p:clrMapOvr>
+</p:sld>
+</file>
+
+<file path=ppt/slides/slide9.xml><?xml version="1.0" encoding="utf-8"?>
+<p:sld xmlns:a="http://schemas.openxmlformats.org/drawingml/2006/main" xmlns:r="http://schemas.openxmlformats.org/officeDocument/2006/relationships" xmlns:p="http://schemas.openxmlformats.org/presentationml/2006/main" show="0">
+  <p:cSld>
+    <p:spTree>
+      <p:nvGrpSpPr>
+        <p:cNvPr id="1" name=""/>
+        <p:cNvGrpSpPr/>
+        <p:nvPr/>
+      </p:nvGrpSpPr>
+      <p:grpSpPr>
+        <a:xfrm>
+          <a:off x="0" y="0"/>
+          <a:ext cx="0" cy="0"/>
+          <a:chOff x="0" y="0"/>
+          <a:chExt cx="0" cy="0"/>
+        </a:xfrm>
+      </p:grpSpPr>
+      <p:sp>
+        <p:nvSpPr>
+          <p:cNvPr id="2" name="Title 1">
+            <a:extLst>
+              <a:ext uri="{FF2B5EF4-FFF2-40B4-BE49-F238E27FC236}">
+                <a16:creationId xmlns:a16="http://schemas.microsoft.com/office/drawing/2014/main" id="{3CD59D57-7116-95BC-1DBC-6CBA9EB8ED06}"/>
+              </a:ext>
+            </a:extLst>
+          </p:cNvPr>
+          <p:cNvSpPr>
+            <a:spLocks noGrp="1"/>
+          </p:cNvSpPr>
+          <p:nvPr>
+            <p:ph type="title"/>
+          </p:nvPr>
+        </p:nvSpPr>
+        <p:spPr/>
+        <p:txBody>
+          <a:bodyPr/>
+          <a:lstStyle/>
+          <a:p>
+            <a:r>
+              <a:rPr lang="en-US" dirty="0"/>
+              <a:t>Process</a:t>
+            </a:r>
+          </a:p>
+        </p:txBody>
+      </p:sp>
+      <p:sp>
+        <p:nvSpPr>
+          <p:cNvPr id="3" name="Content Placeholder 2">
+            <a:extLst>
+              <a:ext uri="{FF2B5EF4-FFF2-40B4-BE49-F238E27FC236}">
+                <a16:creationId xmlns:a16="http://schemas.microsoft.com/office/drawing/2014/main" id="{95EEBC57-1A53-6D8F-5DC2-9D6BA74E162D}"/>
+              </a:ext>
+            </a:extLst>
+          </p:cNvPr>
+          <p:cNvSpPr>
+            <a:spLocks noGrp="1"/>
+          </p:cNvSpPr>
+          <p:nvPr>
+            <p:ph idx="1"/>
+          </p:nvPr>
+        </p:nvSpPr>
+        <p:spPr/>
+        <p:txBody>
+          <a:bodyPr/>
+          <a:lstStyle/>
+          <a:p>
+            <a:endParaRPr lang="en-US" dirty="0"/>
+          </a:p>
+        </p:txBody>
+      </p:sp>
+    </p:spTree>
+    <p:extLst>
+      <p:ext uri="{BB962C8B-B14F-4D97-AF65-F5344CB8AC3E}">
+        <p14:creationId xmlns:p14="http://schemas.microsoft.com/office/powerpoint/2010/main" val="1602447879"/>
       </p:ext>
     </p:extLst>
   </p:cSld>

--- a/slides/kpi.pptx
+++ b/slides/kpi.pptx
@@ -23,6 +23,7 @@
     <p:sldId id="265" r:id="rId17"/>
     <p:sldId id="267" r:id="rId18"/>
     <p:sldId id="268" r:id="rId19"/>
+    <p:sldId id="274" r:id="rId20"/>
   </p:sldIdLst>
   <p:sldSz cx="12192000" cy="6858000"/>
   <p:notesSz cx="6858000" cy="9144000"/>
@@ -268,7 +269,7 @@
           <a:p>
             <a:fld id="{4F9C66F0-894B-A64A-8A1B-2351E00312CE}" type="datetimeFigureOut">
               <a:rPr lang="en-US" smtClean="0"/>
-              <a:t>2/24/26</a:t>
+              <a:t>2/27/26</a:t>
             </a:fld>
             <a:endParaRPr lang="en-US"/>
           </a:p>
@@ -479,7 +480,7 @@
           <a:p>
             <a:fld id="{4F9C66F0-894B-A64A-8A1B-2351E00312CE}" type="datetimeFigureOut">
               <a:rPr lang="en-US" smtClean="0"/>
-              <a:t>2/24/26</a:t>
+              <a:t>2/27/26</a:t>
             </a:fld>
             <a:endParaRPr lang="en-US"/>
           </a:p>
@@ -694,7 +695,7 @@
           <a:p>
             <a:fld id="{4F9C66F0-894B-A64A-8A1B-2351E00312CE}" type="datetimeFigureOut">
               <a:rPr lang="en-US" smtClean="0"/>
-              <a:t>2/24/26</a:t>
+              <a:t>2/27/26</a:t>
             </a:fld>
             <a:endParaRPr lang="en-US"/>
           </a:p>
@@ -895,7 +896,7 @@
           <a:p>
             <a:fld id="{4F9C66F0-894B-A64A-8A1B-2351E00312CE}" type="datetimeFigureOut">
               <a:rPr lang="en-US" smtClean="0"/>
-              <a:t>2/24/26</a:t>
+              <a:t>2/27/26</a:t>
             </a:fld>
             <a:endParaRPr lang="en-US"/>
           </a:p>
@@ -1174,7 +1175,7 @@
           <a:p>
             <a:fld id="{4F9C66F0-894B-A64A-8A1B-2351E00312CE}" type="datetimeFigureOut">
               <a:rPr lang="en-US" smtClean="0"/>
-              <a:t>2/24/26</a:t>
+              <a:t>2/27/26</a:t>
             </a:fld>
             <a:endParaRPr lang="en-US"/>
           </a:p>
@@ -1442,7 +1443,7 @@
           <a:p>
             <a:fld id="{4F9C66F0-894B-A64A-8A1B-2351E00312CE}" type="datetimeFigureOut">
               <a:rPr lang="en-US" smtClean="0"/>
-              <a:t>2/24/26</a:t>
+              <a:t>2/27/26</a:t>
             </a:fld>
             <a:endParaRPr lang="en-US"/>
           </a:p>
@@ -1858,7 +1859,7 @@
           <a:p>
             <a:fld id="{4F9C66F0-894B-A64A-8A1B-2351E00312CE}" type="datetimeFigureOut">
               <a:rPr lang="en-US" smtClean="0"/>
-              <a:t>2/24/26</a:t>
+              <a:t>2/27/26</a:t>
             </a:fld>
             <a:endParaRPr lang="en-US"/>
           </a:p>
@@ -2007,7 +2008,7 @@
           <a:p>
             <a:fld id="{4F9C66F0-894B-A64A-8A1B-2351E00312CE}" type="datetimeFigureOut">
               <a:rPr lang="en-US" smtClean="0"/>
-              <a:t>2/24/26</a:t>
+              <a:t>2/27/26</a:t>
             </a:fld>
             <a:endParaRPr lang="en-US"/>
           </a:p>
@@ -2133,7 +2134,7 @@
           <a:p>
             <a:fld id="{4F9C66F0-894B-A64A-8A1B-2351E00312CE}" type="datetimeFigureOut">
               <a:rPr lang="en-US" smtClean="0"/>
-              <a:t>2/24/26</a:t>
+              <a:t>2/27/26</a:t>
             </a:fld>
             <a:endParaRPr lang="en-US"/>
           </a:p>
@@ -2384,7 +2385,7 @@
           <a:p>
             <a:fld id="{4F9C66F0-894B-A64A-8A1B-2351E00312CE}" type="datetimeFigureOut">
               <a:rPr lang="en-US" smtClean="0"/>
-              <a:t>2/24/26</a:t>
+              <a:t>2/27/26</a:t>
             </a:fld>
             <a:endParaRPr lang="en-US"/>
           </a:p>
@@ -2829,7 +2830,7 @@
           <a:p>
             <a:fld id="{4F9C66F0-894B-A64A-8A1B-2351E00312CE}" type="datetimeFigureOut">
               <a:rPr lang="en-US" smtClean="0"/>
-              <a:t>2/24/26</a:t>
+              <a:t>2/27/26</a:t>
             </a:fld>
             <a:endParaRPr lang="en-US"/>
           </a:p>
@@ -3163,7 +3164,7 @@
           <a:p>
             <a:fld id="{4F9C66F0-894B-A64A-8A1B-2351E00312CE}" type="datetimeFigureOut">
               <a:rPr lang="en-US" smtClean="0"/>
-              <a:t>2/24/26</a:t>
+              <a:t>2/27/26</a:t>
             </a:fld>
             <a:endParaRPr lang="en-US"/>
           </a:p>
@@ -3728,7 +3729,7 @@
             <a:pPr lvl="1"/>
             <a:r>
               <a:rPr lang="en-US" dirty="0"/>
-              <a:t>Tableau extensions. </a:t>
+              <a:t>Tableau extensions and a radar chart. </a:t>
             </a:r>
           </a:p>
           <a:p>
@@ -5199,8 +5200,8 @@
         </p:nvSpPr>
         <p:spPr>
           <a:xfrm>
-            <a:off x="1451579" y="2015732"/>
-            <a:ext cx="9603275" cy="4037749"/>
+            <a:off x="222070" y="1853754"/>
+            <a:ext cx="7591810" cy="4199727"/>
           </a:xfrm>
         </p:spPr>
         <p:txBody>
@@ -5256,10 +5257,120 @@
           </a:p>
         </p:txBody>
       </p:sp>
+      <p:pic>
+        <p:nvPicPr>
+          <p:cNvPr id="4" name="Picture 3" descr="Radar Chart">
+            <a:extLst>
+              <a:ext uri="{FF2B5EF4-FFF2-40B4-BE49-F238E27FC236}">
+                <a16:creationId xmlns:a16="http://schemas.microsoft.com/office/drawing/2014/main" id="{2F7D5267-C1FA-AD0F-CD10-69792D024289}"/>
+              </a:ext>
+            </a:extLst>
+          </p:cNvPr>
+          <p:cNvPicPr>
+            <a:picLocks noChangeAspect="1"/>
+          </p:cNvPicPr>
+          <p:nvPr/>
+        </p:nvPicPr>
+        <p:blipFill>
+          <a:blip r:embed="rId2"/>
+          <a:stretch>
+            <a:fillRect/>
+          </a:stretch>
+        </p:blipFill>
+        <p:spPr>
+          <a:xfrm>
+            <a:off x="7813879" y="1553153"/>
+            <a:ext cx="4378121" cy="4037749"/>
+          </a:xfrm>
+          <a:prstGeom prst="rect">
+            <a:avLst/>
+          </a:prstGeom>
+        </p:spPr>
+      </p:pic>
     </p:spTree>
     <p:extLst>
       <p:ext uri="{BB962C8B-B14F-4D97-AF65-F5344CB8AC3E}">
         <p14:creationId xmlns:p14="http://schemas.microsoft.com/office/powerpoint/2010/main" val="1226656858"/>
+      </p:ext>
+    </p:extLst>
+  </p:cSld>
+  <p:clrMapOvr>
+    <a:masterClrMapping/>
+  </p:clrMapOvr>
+</p:sld>
+</file>
+
+<file path=ppt/slides/slide19.xml><?xml version="1.0" encoding="utf-8"?>
+<p:sld xmlns:a="http://schemas.openxmlformats.org/drawingml/2006/main" xmlns:r="http://schemas.openxmlformats.org/officeDocument/2006/relationships" xmlns:p="http://schemas.openxmlformats.org/presentationml/2006/main">
+  <p:cSld>
+    <p:spTree>
+      <p:nvGrpSpPr>
+        <p:cNvPr id="1" name=""/>
+        <p:cNvGrpSpPr/>
+        <p:nvPr/>
+      </p:nvGrpSpPr>
+      <p:grpSpPr>
+        <a:xfrm>
+          <a:off x="0" y="0"/>
+          <a:ext cx="0" cy="0"/>
+          <a:chOff x="0" y="0"/>
+          <a:chExt cx="0" cy="0"/>
+        </a:xfrm>
+      </p:grpSpPr>
+      <p:sp>
+        <p:nvSpPr>
+          <p:cNvPr id="2" name="Title 1">
+            <a:extLst>
+              <a:ext uri="{FF2B5EF4-FFF2-40B4-BE49-F238E27FC236}">
+                <a16:creationId xmlns:a16="http://schemas.microsoft.com/office/drawing/2014/main" id="{6DD0155C-6A10-7E93-5E47-CD1987C0805C}"/>
+              </a:ext>
+            </a:extLst>
+          </p:cNvPr>
+          <p:cNvSpPr>
+            <a:spLocks noGrp="1"/>
+          </p:cNvSpPr>
+          <p:nvPr>
+            <p:ph type="title"/>
+          </p:nvPr>
+        </p:nvSpPr>
+        <p:spPr/>
+        <p:txBody>
+          <a:bodyPr/>
+          <a:lstStyle/>
+          <a:p>
+            <a:endParaRPr lang="en-US"/>
+          </a:p>
+        </p:txBody>
+      </p:sp>
+      <p:sp>
+        <p:nvSpPr>
+          <p:cNvPr id="3" name="Content Placeholder 2">
+            <a:extLst>
+              <a:ext uri="{FF2B5EF4-FFF2-40B4-BE49-F238E27FC236}">
+                <a16:creationId xmlns:a16="http://schemas.microsoft.com/office/drawing/2014/main" id="{F8E81A8D-9107-039B-408B-95718581A7DF}"/>
+              </a:ext>
+            </a:extLst>
+          </p:cNvPr>
+          <p:cNvSpPr>
+            <a:spLocks noGrp="1"/>
+          </p:cNvSpPr>
+          <p:nvPr>
+            <p:ph idx="1"/>
+          </p:nvPr>
+        </p:nvSpPr>
+        <p:spPr/>
+        <p:txBody>
+          <a:bodyPr/>
+          <a:lstStyle/>
+          <a:p>
+            <a:endParaRPr lang="en-US"/>
+          </a:p>
+        </p:txBody>
+      </p:sp>
+    </p:spTree>
+    <p:extLst>
+      <p:ext uri="{BB962C8B-B14F-4D97-AF65-F5344CB8AC3E}">
+        <p14:creationId xmlns:p14="http://schemas.microsoft.com/office/powerpoint/2010/main" val="2144636716"/>
       </p:ext>
     </p:extLst>
   </p:cSld>
